--- a/yocto_training_all_session_decks/session_decks/D1S6_BitBake_Deep_Dive.pptx
+++ b/yocto_training_all_session_decks/session_decks/D1S6_BitBake_Deep_Dive.pptx
@@ -5,26 +5,26 @@
     <p:sldMasterId id="2147483648" r:id="rId1"/>
   </p:sldMasterIdLst>
   <p:notesMasterIdLst>
-    <p:notesMasterId r:id="rId8"/>
+    <p:notesMasterId r:id="rId11"/>
   </p:notesMasterIdLst>
   <p:handoutMasterIdLst>
-    <p:handoutMasterId r:id="rId9"/>
+    <p:handoutMasterId r:id="rId12"/>
   </p:handoutMasterIdLst>
   <p:sldIdLst>
-    <p:sldId id="1007" r:id="rId18"/>
-    <p:sldId id="1008" r:id="rId19"/>
-    <p:sldId id="1009" r:id="rId20"/>
-    <p:sldId id="1010" r:id="rId21"/>
-    <p:sldId id="1011" r:id="rId22"/>
-    <p:sldId id="1012" r:id="rId23"/>
-    <p:sldId id="1013" r:id="rId24"/>
-    <p:sldId id="1014" r:id="rId25"/>
-    <p:sldId id="1015" r:id="rId26"/>
+    <p:sldId id="1007" r:id="rId2"/>
+    <p:sldId id="1008" r:id="rId3"/>
+    <p:sldId id="1009" r:id="rId4"/>
+    <p:sldId id="1010" r:id="rId5"/>
+    <p:sldId id="1011" r:id="rId6"/>
+    <p:sldId id="1012" r:id="rId7"/>
+    <p:sldId id="1013" r:id="rId8"/>
+    <p:sldId id="1014" r:id="rId9"/>
+    <p:sldId id="1015" r:id="rId10"/>
   </p:sldIdLst>
   <p:sldSz cx="12192000" cy="6858000"/>
   <p:notesSz cx="6858000" cy="9144000"/>
   <p:custDataLst>
-    <p:tags r:id="rId10"/>
+    <p:tags r:id="rId13"/>
   </p:custDataLst>
   <p:defaultTextStyle>
     <a:defPPr>
@@ -2930,7 +2930,7 @@
           <a:p>
             <a:fld id="{0CEC647C-F50C-4F78-AA33-D7AA6CDA18EE}" type="datetimeFigureOut">
               <a:rPr lang="en-US" smtClean="0"/>
-              <a:t>7/13/2025</a:t>
+              <a:t>6/8/2026</a:t>
             </a:fld>
             <a:endParaRPr lang="en-US"/>
           </a:p>
@@ -3095,7 +3095,7 @@
           <a:p>
             <a:fld id="{3A83341F-E62C-483B-84B4-966F8BE46097}" type="datetimeFigureOut">
               <a:rPr lang="en-US" smtClean="0"/>
-              <a:t>7/13/2025</a:t>
+              <a:t>6/8/2026</a:t>
             </a:fld>
             <a:endParaRPr lang="en-US"/>
           </a:p>
@@ -5179,8 +5179,8 @@
 </p:sldMaster>
 </file>
 
-<file path=ppt/slides/slide10.xml><?xml version="1.0" encoding="utf-8"?>
-<p:sld xmlns:a="http://schemas.openxmlformats.org/drawingml/2006/main" xmlns:p="http://schemas.openxmlformats.org/presentationml/2006/main" xmlns:r="http://schemas.openxmlformats.org/officeDocument/2006/relationships">
+<file path=ppt/slides/slide1.xml><?xml version="1.0" encoding="utf-8"?>
+<p:sld xmlns:a="http://schemas.openxmlformats.org/drawingml/2006/main" xmlns:r="http://schemas.openxmlformats.org/officeDocument/2006/relationships" xmlns:p="http://schemas.openxmlformats.org/presentationml/2006/main">
   <p:cSld>
     <p:spTree>
       <p:nvGrpSpPr>
@@ -5188,7 +5188,120 @@
         <p:cNvGrpSpPr/>
         <p:nvPr/>
       </p:nvGrpSpPr>
-      <p:grpSpPr/>
+      <p:grpSpPr>
+        <a:xfrm>
+          <a:off x="0" y="0"/>
+          <a:ext cx="0" cy="0"/>
+          <a:chOff x="0" y="0"/>
+          <a:chExt cx="0" cy="0"/>
+        </a:xfrm>
+      </p:grpSpPr>
+      <p:sp>
+        <p:nvSpPr>
+          <p:cNvPr id="2" name="Title 1"/>
+          <p:cNvSpPr>
+            <a:spLocks noGrp="1"/>
+          </p:cNvSpPr>
+          <p:nvPr>
+            <p:ph type="ctrTitle"/>
+          </p:nvPr>
+        </p:nvSpPr>
+        <p:spPr/>
+        <p:txBody>
+          <a:bodyPr/>
+          <a:lstStyle/>
+          <a:p>
+            <a:r>
+              <a:rPr sz="4400" b="1">
+                <a:solidFill>
+                  <a:srgbClr val="FFFFFF"/>
+                </a:solidFill>
+                <a:latin typeface="Calibri"/>
+              </a:rPr>
+              <a:t>BitBake Deep Dive</a:t>
+            </a:r>
+          </a:p>
+        </p:txBody>
+      </p:sp>
+      <p:sp>
+        <p:nvSpPr>
+          <p:cNvPr id="3" name="Subtitle 2"/>
+          <p:cNvSpPr>
+            <a:spLocks noGrp="1"/>
+          </p:cNvSpPr>
+          <p:nvPr>
+            <p:ph type="subTitle" idx="1"/>
+          </p:nvPr>
+        </p:nvSpPr>
+        <p:spPr/>
+        <p:txBody>
+          <a:bodyPr/>
+          <a:lstStyle/>
+          <a:p>
+            <a:r>
+              <a:rPr sz="1800" dirty="0">
+                <a:solidFill>
+                  <a:srgbClr val="FFFFFF"/>
+                </a:solidFill>
+                <a:latin typeface="Calibri"/>
+              </a:rPr>
+              <a:t>Tasks, </a:t>
+            </a:r>
+            <a:r>
+              <a:rPr sz="1800" dirty="0" err="1">
+                <a:solidFill>
+                  <a:srgbClr val="FFFFFF"/>
+                </a:solidFill>
+                <a:latin typeface="Calibri"/>
+              </a:rPr>
+              <a:t>execut</a:t>
+            </a:r>
+            <a:r>
+              <a:rPr lang="en-IN" sz="1800" dirty="0" err="1">
+                <a:solidFill>
+                  <a:srgbClr val="FFFFFF"/>
+                </a:solidFill>
+                <a:latin typeface="Calibri"/>
+              </a:rPr>
+              <a:t>i</a:t>
+            </a:r>
+            <a:r>
+              <a:rPr sz="1800" dirty="0">
+                <a:solidFill>
+                  <a:srgbClr val="FFFFFF"/>
+                </a:solidFill>
+                <a:latin typeface="Calibri"/>
+              </a:rPr>
+              <a:t>on, variables, overrides</a:t>
+            </a:r>
+          </a:p>
+        </p:txBody>
+      </p:sp>
+    </p:spTree>
+  </p:cSld>
+  <p:clrMapOvr>
+    <a:masterClrMapping/>
+  </p:clrMapOvr>
+</p:sld>
+</file>
+
+<file path=ppt/slides/slide2.xml><?xml version="1.0" encoding="utf-8"?>
+<p:sld xmlns:a="http://schemas.openxmlformats.org/drawingml/2006/main" xmlns:r="http://schemas.openxmlformats.org/officeDocument/2006/relationships" xmlns:p="http://schemas.openxmlformats.org/presentationml/2006/main">
+  <p:cSld>
+    <p:spTree>
+      <p:nvGrpSpPr>
+        <p:cNvPr id="1" name=""/>
+        <p:cNvGrpSpPr/>
+        <p:nvPr/>
+      </p:nvGrpSpPr>
+      <p:grpSpPr>
+        <a:xfrm>
+          <a:off x="0" y="0"/>
+          <a:ext cx="0" cy="0"/>
+          <a:chOff x="0" y="0"/>
+          <a:chExt cx="0" cy="0"/>
+        </a:xfrm>
+      </p:grpSpPr>
       <p:sp>
         <p:nvSpPr>
           <p:cNvPr id="2" name="Title 1"/>
@@ -5205,13 +5318,310 @@
           <a:lstStyle/>
           <a:p>
             <a:r>
-              <a:rPr sz="3200" b="1">
-                <a:solidFill>
-                  <a:srgbClr val="CC0066"/>
-                </a:solidFill>
-                <a:latin typeface="Calibri"/>
-              </a:rPr>
-              <a:t>The Standard Task Chain</a:t>
+              <a:rPr sz="3200" b="1" dirty="0">
+                <a:latin typeface="Calibri"/>
+              </a:rPr>
+              <a:t>Session Agenda</a:t>
+            </a:r>
+          </a:p>
+        </p:txBody>
+      </p:sp>
+      <p:sp>
+        <p:nvSpPr>
+          <p:cNvPr id="3" name="TextBox 2"/>
+          <p:cNvSpPr txBox="1"/>
+          <p:nvPr/>
+        </p:nvSpPr>
+        <p:spPr>
+          <a:xfrm>
+            <a:off x="822960" y="1463040"/>
+            <a:ext cx="10515600" cy="2323713"/>
+          </a:xfrm>
+          <a:prstGeom prst="rect">
+            <a:avLst/>
+          </a:prstGeom>
+          <a:noFill/>
+        </p:spPr>
+        <p:txBody>
+          <a:bodyPr wrap="square" lIns="45720" rIns="45720">
+            <a:spAutoFit/>
+          </a:bodyPr>
+          <a:lstStyle/>
+          <a:p>
+            <a:pPr>
+              <a:spcAft>
+                <a:spcPts val="600"/>
+              </a:spcAft>
+            </a:pPr>
+            <a:r>
+              <a:rPr sz="2000" b="0" i="0" dirty="0">
+                <a:solidFill>
+                  <a:srgbClr val="333333"/>
+                </a:solidFill>
+                <a:latin typeface="Calibri"/>
+              </a:rPr>
+              <a:t>1.  </a:t>
+            </a:r>
+            <a:r>
+              <a:rPr sz="2000" b="0" i="0" dirty="0" err="1">
+                <a:solidFill>
+                  <a:srgbClr val="333333"/>
+                </a:solidFill>
+                <a:latin typeface="Calibri"/>
+              </a:rPr>
+              <a:t>BitBake's</a:t>
+            </a:r>
+            <a:r>
+              <a:rPr sz="2000" b="0" i="0" dirty="0">
+                <a:solidFill>
+                  <a:srgbClr val="333333"/>
+                </a:solidFill>
+                <a:latin typeface="Calibri"/>
+              </a:rPr>
+              <a:t> job</a:t>
+            </a:r>
+            <a:r>
+              <a:rPr lang="en-IN" sz="2000" b="0" i="0" dirty="0">
+                <a:solidFill>
+                  <a:srgbClr val="333333"/>
+                </a:solidFill>
+                <a:latin typeface="Calibri"/>
+              </a:rPr>
+              <a:t>:</a:t>
+            </a:r>
+            <a:r>
+              <a:rPr sz="2000" b="0" i="0" dirty="0">
+                <a:solidFill>
+                  <a:srgbClr val="333333"/>
+                </a:solidFill>
+                <a:latin typeface="Calibri"/>
+              </a:rPr>
+              <a:t> parse, plan, execute</a:t>
+            </a:r>
+          </a:p>
+          <a:p>
+            <a:pPr>
+              <a:spcAft>
+                <a:spcPts val="600"/>
+              </a:spcAft>
+            </a:pPr>
+            <a:r>
+              <a:rPr sz="2000" b="0" i="0" dirty="0">
+                <a:solidFill>
+                  <a:srgbClr val="333333"/>
+                </a:solidFill>
+                <a:latin typeface="Calibri"/>
+              </a:rPr>
+              <a:t>2.  The standard task chain</a:t>
+            </a:r>
+          </a:p>
+          <a:p>
+            <a:pPr>
+              <a:spcAft>
+                <a:spcPts val="600"/>
+              </a:spcAft>
+            </a:pPr>
+            <a:r>
+              <a:rPr sz="2000" b="0" i="0" dirty="0">
+                <a:solidFill>
+                  <a:srgbClr val="333333"/>
+                </a:solidFill>
+                <a:latin typeface="Calibri"/>
+              </a:rPr>
+              <a:t>3.  Variables</a:t>
+            </a:r>
+            <a:r>
+              <a:rPr lang="en-IN" sz="2000" b="0" i="0" dirty="0">
+                <a:solidFill>
+                  <a:srgbClr val="333333"/>
+                </a:solidFill>
+                <a:latin typeface="Calibri"/>
+              </a:rPr>
+              <a:t>:</a:t>
+            </a:r>
+            <a:r>
+              <a:rPr sz="2000" b="0" i="0" dirty="0">
+                <a:solidFill>
+                  <a:srgbClr val="333333"/>
+                </a:solidFill>
+                <a:latin typeface="Calibri"/>
+              </a:rPr>
+              <a:t> assignment operators</a:t>
+            </a:r>
+          </a:p>
+          <a:p>
+            <a:pPr>
+              <a:spcAft>
+                <a:spcPts val="600"/>
+              </a:spcAft>
+            </a:pPr>
+            <a:r>
+              <a:rPr sz="2000" b="0" i="0" dirty="0">
+                <a:solidFill>
+                  <a:srgbClr val="333333"/>
+                </a:solidFill>
+                <a:latin typeface="Calibri"/>
+              </a:rPr>
+              <a:t>4.  Overrides</a:t>
+            </a:r>
+            <a:r>
+              <a:rPr lang="en-IN" sz="2000" dirty="0">
+                <a:solidFill>
+                  <a:srgbClr val="333333"/>
+                </a:solidFill>
+                <a:latin typeface="Calibri"/>
+              </a:rPr>
+              <a:t>:</a:t>
+            </a:r>
+            <a:r>
+              <a:rPr sz="2000" b="0" i="0" dirty="0">
+                <a:solidFill>
+                  <a:srgbClr val="333333"/>
+                </a:solidFill>
+                <a:latin typeface="Calibri"/>
+              </a:rPr>
+              <a:t> how </a:t>
+            </a:r>
+            <a:r>
+              <a:rPr sz="2000" b="0" i="0" dirty="0" err="1">
+                <a:solidFill>
+                  <a:srgbClr val="333333"/>
+                </a:solidFill>
+                <a:latin typeface="Calibri"/>
+              </a:rPr>
+              <a:t>Yocto</a:t>
+            </a:r>
+            <a:r>
+              <a:rPr sz="2000" b="0" i="0" dirty="0">
+                <a:solidFill>
+                  <a:srgbClr val="333333"/>
+                </a:solidFill>
+                <a:latin typeface="Calibri"/>
+              </a:rPr>
+              <a:t> picks variants</a:t>
+            </a:r>
+          </a:p>
+          <a:p>
+            <a:pPr>
+              <a:spcAft>
+                <a:spcPts val="600"/>
+              </a:spcAft>
+            </a:pPr>
+            <a:r>
+              <a:rPr sz="2000" b="0" i="0" dirty="0">
+                <a:solidFill>
+                  <a:srgbClr val="333333"/>
+                </a:solidFill>
+                <a:latin typeface="Calibri"/>
+              </a:rPr>
+              <a:t>5.  Configuration files: </a:t>
+            </a:r>
+            <a:r>
+              <a:rPr sz="2000" b="0" i="0" dirty="0" err="1">
+                <a:solidFill>
+                  <a:srgbClr val="333333"/>
+                </a:solidFill>
+                <a:latin typeface="Calibri"/>
+              </a:rPr>
+              <a:t>local.conf</a:t>
+            </a:r>
+            <a:r>
+              <a:rPr sz="2000" b="0" i="0" dirty="0">
+                <a:solidFill>
+                  <a:srgbClr val="333333"/>
+                </a:solidFill>
+                <a:latin typeface="Calibri"/>
+              </a:rPr>
+              <a:t>, </a:t>
+            </a:r>
+            <a:r>
+              <a:rPr sz="2000" b="0" i="0" dirty="0" err="1">
+                <a:solidFill>
+                  <a:srgbClr val="333333"/>
+                </a:solidFill>
+                <a:latin typeface="Calibri"/>
+              </a:rPr>
+              <a:t>bblayers.conf</a:t>
+            </a:r>
+            <a:r>
+              <a:rPr sz="2000" b="0" i="0" dirty="0">
+                <a:solidFill>
+                  <a:srgbClr val="333333"/>
+                </a:solidFill>
+                <a:latin typeface="Calibri"/>
+              </a:rPr>
+              <a:t>, distro/machine config</a:t>
+            </a:r>
+          </a:p>
+          <a:p>
+            <a:pPr>
+              <a:spcAft>
+                <a:spcPts val="600"/>
+              </a:spcAft>
+            </a:pPr>
+            <a:r>
+              <a:rPr sz="2000" b="0" i="0" dirty="0">
+                <a:solidFill>
+                  <a:srgbClr val="333333"/>
+                </a:solidFill>
+                <a:latin typeface="Calibri"/>
+              </a:rPr>
+              <a:t>6.  Useful inspection commands</a:t>
+            </a:r>
+          </a:p>
+        </p:txBody>
+      </p:sp>
+    </p:spTree>
+  </p:cSld>
+  <p:clrMapOvr>
+    <a:masterClrMapping/>
+  </p:clrMapOvr>
+</p:sld>
+</file>
+
+<file path=ppt/slides/slide3.xml><?xml version="1.0" encoding="utf-8"?>
+<p:sld xmlns:a="http://schemas.openxmlformats.org/drawingml/2006/main" xmlns:r="http://schemas.openxmlformats.org/officeDocument/2006/relationships" xmlns:p="http://schemas.openxmlformats.org/presentationml/2006/main">
+  <p:cSld>
+    <p:spTree>
+      <p:nvGrpSpPr>
+        <p:cNvPr id="1" name=""/>
+        <p:cNvGrpSpPr/>
+        <p:nvPr/>
+      </p:nvGrpSpPr>
+      <p:grpSpPr>
+        <a:xfrm>
+          <a:off x="0" y="0"/>
+          <a:ext cx="0" cy="0"/>
+          <a:chOff x="0" y="0"/>
+          <a:chExt cx="0" cy="0"/>
+        </a:xfrm>
+      </p:grpSpPr>
+      <p:sp>
+        <p:nvSpPr>
+          <p:cNvPr id="2" name="Title 1"/>
+          <p:cNvSpPr>
+            <a:spLocks noGrp="1"/>
+          </p:cNvSpPr>
+          <p:nvPr>
+            <p:ph type="title"/>
+          </p:nvPr>
+        </p:nvSpPr>
+        <p:spPr/>
+        <p:txBody>
+          <a:bodyPr/>
+          <a:lstStyle/>
+          <a:p>
+            <a:r>
+              <a:rPr sz="3200" b="1" dirty="0" err="1">
+                <a:latin typeface="Calibri"/>
+              </a:rPr>
+              <a:t>BitBake's</a:t>
+            </a:r>
+            <a:r>
+              <a:rPr sz="3200" b="1" dirty="0">
+                <a:latin typeface="Calibri"/>
+              </a:rPr>
+              <a:t> Job</a:t>
             </a:r>
           </a:p>
         </p:txBody>
@@ -5225,7 +5635,7 @@
         <p:spPr>
           <a:xfrm>
             <a:off x="822960" y="1417320"/>
-            <a:ext cx="10515600" cy="365760"/>
+            <a:ext cx="10515600" cy="338554"/>
           </a:xfrm>
           <a:prstGeom prst="rect">
             <a:avLst/>
@@ -5233,14 +5643,878 @@
           <a:noFill/>
         </p:spPr>
         <p:txBody>
-          <a:bodyPr wrap="square" anchor="t" lIns="45720" rIns="45720">
+          <a:bodyPr wrap="square" lIns="45720" rIns="45720" anchor="t">
             <a:spAutoFit/>
           </a:bodyPr>
           <a:lstStyle/>
           <a:p>
             <a:pPr algn="l"/>
             <a:r>
-              <a:rPr sz="1500" b="0" i="1">
+              <a:rPr sz="1600" b="0" i="1" dirty="0">
+                <a:solidFill>
+                  <a:srgbClr val="666666"/>
+                </a:solidFill>
+                <a:latin typeface="Calibri"/>
+              </a:rPr>
+              <a:t>Three phases for every build.</a:t>
+            </a:r>
+          </a:p>
+        </p:txBody>
+      </p:sp>
+      <p:sp>
+        <p:nvSpPr>
+          <p:cNvPr id="4" name="Rectangle 3"/>
+          <p:cNvSpPr/>
+          <p:nvPr/>
+        </p:nvSpPr>
+        <p:spPr>
+          <a:xfrm>
+            <a:off x="640080" y="1783080"/>
+            <a:ext cx="3520440" cy="640080"/>
+          </a:xfrm>
+          <a:prstGeom prst="rect">
+            <a:avLst/>
+          </a:prstGeom>
+          <a:solidFill>
+            <a:srgbClr val="CC0066"/>
+          </a:solidFill>
+          <a:ln>
+            <a:noFill/>
+          </a:ln>
+          <a:effectLst/>
+        </p:spPr>
+        <p:style>
+          <a:lnRef idx="1">
+            <a:schemeClr val="accent1"/>
+          </a:lnRef>
+          <a:fillRef idx="3">
+            <a:schemeClr val="accent1"/>
+          </a:fillRef>
+          <a:effectRef idx="2">
+            <a:schemeClr val="accent1"/>
+          </a:effectRef>
+          <a:fontRef idx="minor">
+            <a:schemeClr val="lt1"/>
+          </a:fontRef>
+        </p:style>
+        <p:txBody>
+          <a:bodyPr lIns="182880" rtlCol="0" anchor="ctr"/>
+          <a:lstStyle/>
+          <a:p>
+            <a:pPr algn="ctr"/>
+            <a:r>
+              <a:rPr sz="2000" b="1" dirty="0">
+                <a:solidFill>
+                  <a:srgbClr val="FFFFFF"/>
+                </a:solidFill>
+                <a:latin typeface="Calibri"/>
+              </a:rPr>
+              <a:t>Parse</a:t>
+            </a:r>
+          </a:p>
+          <a:p>
+            <a:r>
+              <a:rPr sz="1600" i="1" dirty="0">
+                <a:solidFill>
+                  <a:srgbClr val="FFFFFF"/>
+                </a:solidFill>
+                <a:latin typeface="Calibri"/>
+              </a:rPr>
+              <a:t>Read metadata</a:t>
+            </a:r>
+          </a:p>
+        </p:txBody>
+      </p:sp>
+      <p:sp>
+        <p:nvSpPr>
+          <p:cNvPr id="5" name="Rectangle 4"/>
+          <p:cNvSpPr/>
+          <p:nvPr/>
+        </p:nvSpPr>
+        <p:spPr>
+          <a:xfrm>
+            <a:off x="640080" y="2423160"/>
+            <a:ext cx="3520440" cy="3931920"/>
+          </a:xfrm>
+          <a:prstGeom prst="rect">
+            <a:avLst/>
+          </a:prstGeom>
+          <a:solidFill>
+            <a:srgbClr val="FAFAFA"/>
+          </a:solidFill>
+          <a:ln w="6350">
+            <a:solidFill>
+              <a:srgbClr val="CC0066"/>
+            </a:solidFill>
+          </a:ln>
+          <a:effectLst/>
+        </p:spPr>
+        <p:style>
+          <a:lnRef idx="1">
+            <a:schemeClr val="accent1"/>
+          </a:lnRef>
+          <a:fillRef idx="3">
+            <a:schemeClr val="accent1"/>
+          </a:fillRef>
+          <a:effectRef idx="2">
+            <a:schemeClr val="accent1"/>
+          </a:effectRef>
+          <a:fontRef idx="minor">
+            <a:schemeClr val="lt1"/>
+          </a:fontRef>
+        </p:style>
+        <p:txBody>
+          <a:bodyPr rtlCol="0" anchor="ctr"/>
+          <a:lstStyle/>
+          <a:p>
+            <a:pPr algn="ctr"/>
+            <a:endParaRPr/>
+          </a:p>
+        </p:txBody>
+      </p:sp>
+      <p:sp>
+        <p:nvSpPr>
+          <p:cNvPr id="6" name="TextBox 5"/>
+          <p:cNvSpPr txBox="1"/>
+          <p:nvPr/>
+        </p:nvSpPr>
+        <p:spPr>
+          <a:xfrm>
+            <a:off x="731519" y="2514600"/>
+            <a:ext cx="3337560" cy="2728952"/>
+          </a:xfrm>
+          <a:prstGeom prst="rect">
+            <a:avLst/>
+          </a:prstGeom>
+          <a:noFill/>
+        </p:spPr>
+        <p:txBody>
+          <a:bodyPr wrap="square" lIns="45720" rIns="45720">
+            <a:spAutoFit/>
+          </a:bodyPr>
+          <a:lstStyle/>
+          <a:p>
+            <a:pPr>
+              <a:spcAft>
+                <a:spcPts val="400"/>
+              </a:spcAft>
+            </a:pPr>
+            <a:r>
+              <a:rPr b="1" i="0" dirty="0">
+                <a:solidFill>
+                  <a:srgbClr val="CC0066"/>
+                </a:solidFill>
+                <a:latin typeface="Calibri"/>
+              </a:rPr>
+              <a:t>Reads:</a:t>
+            </a:r>
+          </a:p>
+          <a:p>
+            <a:pPr>
+              <a:spcAft>
+                <a:spcPts val="400"/>
+              </a:spcAft>
+            </a:pPr>
+            <a:r>
+              <a:rPr sz="1600" b="0" i="0" dirty="0">
+                <a:solidFill>
+                  <a:srgbClr val="333333"/>
+                </a:solidFill>
+                <a:latin typeface="Calibri"/>
+              </a:rPr>
+              <a:t>.bb (recipes)</a:t>
+            </a:r>
+          </a:p>
+          <a:p>
+            <a:pPr>
+              <a:spcAft>
+                <a:spcPts val="400"/>
+              </a:spcAft>
+            </a:pPr>
+            <a:r>
+              <a:rPr sz="1600" b="0" i="0" dirty="0">
+                <a:solidFill>
+                  <a:srgbClr val="333333"/>
+                </a:solidFill>
+                <a:latin typeface="Calibri"/>
+              </a:rPr>
+              <a:t>.</a:t>
+            </a:r>
+            <a:r>
+              <a:rPr sz="1600" b="0" i="0" dirty="0" err="1">
+                <a:solidFill>
+                  <a:srgbClr val="333333"/>
+                </a:solidFill>
+                <a:latin typeface="Calibri"/>
+              </a:rPr>
+              <a:t>bbclass</a:t>
+            </a:r>
+            <a:r>
+              <a:rPr sz="1600" b="0" i="0" dirty="0">
+                <a:solidFill>
+                  <a:srgbClr val="333333"/>
+                </a:solidFill>
+                <a:latin typeface="Calibri"/>
+              </a:rPr>
+              <a:t> (classes)</a:t>
+            </a:r>
+          </a:p>
+          <a:p>
+            <a:pPr>
+              <a:spcAft>
+                <a:spcPts val="400"/>
+              </a:spcAft>
+            </a:pPr>
+            <a:r>
+              <a:rPr sz="1600" b="0" i="0" dirty="0">
+                <a:solidFill>
+                  <a:srgbClr val="333333"/>
+                </a:solidFill>
+                <a:latin typeface="Calibri"/>
+              </a:rPr>
+              <a:t>.conf (configuration)</a:t>
+            </a:r>
+          </a:p>
+          <a:p>
+            <a:pPr>
+              <a:spcAft>
+                <a:spcPts val="400"/>
+              </a:spcAft>
+            </a:pPr>
+            <a:r>
+              <a:rPr sz="1600" b="0" i="0" dirty="0">
+                <a:solidFill>
+                  <a:srgbClr val="333333"/>
+                </a:solidFill>
+                <a:latin typeface="Calibri"/>
+              </a:rPr>
+              <a:t>.</a:t>
+            </a:r>
+            <a:r>
+              <a:rPr sz="1600" b="0" i="0" dirty="0" err="1">
+                <a:solidFill>
+                  <a:srgbClr val="333333"/>
+                </a:solidFill>
+                <a:latin typeface="Calibri"/>
+              </a:rPr>
+              <a:t>inc</a:t>
+            </a:r>
+            <a:r>
+              <a:rPr sz="1600" b="0" i="0" dirty="0">
+                <a:solidFill>
+                  <a:srgbClr val="333333"/>
+                </a:solidFill>
+                <a:latin typeface="Calibri"/>
+              </a:rPr>
+              <a:t> (includes)</a:t>
+            </a:r>
+          </a:p>
+          <a:p>
+            <a:pPr>
+              <a:spcAft>
+                <a:spcPts val="400"/>
+              </a:spcAft>
+            </a:pPr>
+            <a:endParaRPr sz="1600" b="0" i="0" dirty="0">
+              <a:solidFill>
+                <a:srgbClr val="333333"/>
+              </a:solidFill>
+              <a:latin typeface="Calibri"/>
+            </a:endParaRPr>
+          </a:p>
+          <a:p>
+            <a:pPr>
+              <a:spcAft>
+                <a:spcPts val="400"/>
+              </a:spcAft>
+            </a:pPr>
+            <a:r>
+              <a:rPr b="1" i="0" dirty="0">
+                <a:solidFill>
+                  <a:srgbClr val="CC0066"/>
+                </a:solidFill>
+                <a:latin typeface="Calibri"/>
+              </a:rPr>
+              <a:t>Output:</a:t>
+            </a:r>
+          </a:p>
+          <a:p>
+            <a:pPr>
+              <a:spcAft>
+                <a:spcPts val="400"/>
+              </a:spcAft>
+            </a:pPr>
+            <a:r>
+              <a:rPr sz="1600" b="0" i="0" dirty="0">
+                <a:solidFill>
+                  <a:srgbClr val="333333"/>
+                </a:solidFill>
+                <a:latin typeface="Calibri"/>
+              </a:rPr>
+              <a:t>A dependency database of all recipes, variables, tasks</a:t>
+            </a:r>
+          </a:p>
+        </p:txBody>
+      </p:sp>
+      <p:sp>
+        <p:nvSpPr>
+          <p:cNvPr id="7" name="Rectangle 6"/>
+          <p:cNvSpPr/>
+          <p:nvPr/>
+        </p:nvSpPr>
+        <p:spPr>
+          <a:xfrm>
+            <a:off x="4297680" y="1783080"/>
+            <a:ext cx="3520440" cy="640080"/>
+          </a:xfrm>
+          <a:prstGeom prst="rect">
+            <a:avLst/>
+          </a:prstGeom>
+          <a:solidFill>
+            <a:srgbClr val="663399"/>
+          </a:solidFill>
+          <a:ln>
+            <a:noFill/>
+          </a:ln>
+          <a:effectLst/>
+        </p:spPr>
+        <p:style>
+          <a:lnRef idx="1">
+            <a:schemeClr val="accent1"/>
+          </a:lnRef>
+          <a:fillRef idx="3">
+            <a:schemeClr val="accent1"/>
+          </a:fillRef>
+          <a:effectRef idx="2">
+            <a:schemeClr val="accent1"/>
+          </a:effectRef>
+          <a:fontRef idx="minor">
+            <a:schemeClr val="lt1"/>
+          </a:fontRef>
+        </p:style>
+        <p:txBody>
+          <a:bodyPr lIns="182880" rtlCol="0" anchor="ctr"/>
+          <a:lstStyle/>
+          <a:p>
+            <a:pPr algn="ctr"/>
+            <a:r>
+              <a:rPr sz="2000" b="1" dirty="0">
+                <a:solidFill>
+                  <a:srgbClr val="FFFFFF"/>
+                </a:solidFill>
+                <a:latin typeface="Calibri"/>
+              </a:rPr>
+              <a:t>Plan</a:t>
+            </a:r>
+          </a:p>
+          <a:p>
+            <a:r>
+              <a:rPr sz="1600" i="1" dirty="0">
+                <a:solidFill>
+                  <a:srgbClr val="FFFFFF"/>
+                </a:solidFill>
+                <a:latin typeface="Calibri"/>
+              </a:rPr>
+              <a:t>Build task graph</a:t>
+            </a:r>
+          </a:p>
+        </p:txBody>
+      </p:sp>
+      <p:sp>
+        <p:nvSpPr>
+          <p:cNvPr id="8" name="Rectangle 7"/>
+          <p:cNvSpPr/>
+          <p:nvPr/>
+        </p:nvSpPr>
+        <p:spPr>
+          <a:xfrm>
+            <a:off x="4297680" y="2423160"/>
+            <a:ext cx="3520440" cy="3931920"/>
+          </a:xfrm>
+          <a:prstGeom prst="rect">
+            <a:avLst/>
+          </a:prstGeom>
+          <a:solidFill>
+            <a:srgbClr val="FAFAFA"/>
+          </a:solidFill>
+          <a:ln w="6350">
+            <a:solidFill>
+              <a:srgbClr val="663399"/>
+            </a:solidFill>
+          </a:ln>
+          <a:effectLst/>
+        </p:spPr>
+        <p:style>
+          <a:lnRef idx="1">
+            <a:schemeClr val="accent1"/>
+          </a:lnRef>
+          <a:fillRef idx="3">
+            <a:schemeClr val="accent1"/>
+          </a:fillRef>
+          <a:effectRef idx="2">
+            <a:schemeClr val="accent1"/>
+          </a:effectRef>
+          <a:fontRef idx="minor">
+            <a:schemeClr val="lt1"/>
+          </a:fontRef>
+        </p:style>
+        <p:txBody>
+          <a:bodyPr rtlCol="0" anchor="ctr"/>
+          <a:lstStyle/>
+          <a:p>
+            <a:pPr algn="ctr"/>
+            <a:endParaRPr/>
+          </a:p>
+        </p:txBody>
+      </p:sp>
+      <p:sp>
+        <p:nvSpPr>
+          <p:cNvPr id="9" name="TextBox 8"/>
+          <p:cNvSpPr txBox="1"/>
+          <p:nvPr/>
+        </p:nvSpPr>
+        <p:spPr>
+          <a:xfrm>
+            <a:off x="4389120" y="2514600"/>
+            <a:ext cx="3337560" cy="2431435"/>
+          </a:xfrm>
+          <a:prstGeom prst="rect">
+            <a:avLst/>
+          </a:prstGeom>
+          <a:noFill/>
+        </p:spPr>
+        <p:txBody>
+          <a:bodyPr wrap="square" lIns="45720" rIns="45720">
+            <a:spAutoFit/>
+          </a:bodyPr>
+          <a:lstStyle/>
+          <a:p>
+            <a:pPr>
+              <a:spcAft>
+                <a:spcPts val="400"/>
+              </a:spcAft>
+            </a:pPr>
+            <a:r>
+              <a:rPr b="1" i="0">
+                <a:solidFill>
+                  <a:srgbClr val="663399"/>
+                </a:solidFill>
+                <a:latin typeface="Calibri"/>
+              </a:rPr>
+              <a:t>Resolves:</a:t>
+            </a:r>
+          </a:p>
+          <a:p>
+            <a:pPr>
+              <a:spcAft>
+                <a:spcPts val="400"/>
+              </a:spcAft>
+            </a:pPr>
+            <a:r>
+              <a:rPr sz="1600" b="0" i="0">
+                <a:solidFill>
+                  <a:srgbClr val="333333"/>
+                </a:solidFill>
+                <a:latin typeface="Calibri"/>
+              </a:rPr>
+              <a:t>Build-time dependencies</a:t>
+            </a:r>
+          </a:p>
+          <a:p>
+            <a:pPr>
+              <a:spcAft>
+                <a:spcPts val="400"/>
+              </a:spcAft>
+            </a:pPr>
+            <a:r>
+              <a:rPr sz="1600" b="0" i="0">
+                <a:solidFill>
+                  <a:srgbClr val="333333"/>
+                </a:solidFill>
+                <a:latin typeface="Calibri"/>
+              </a:rPr>
+              <a:t>Runtime dependencies</a:t>
+            </a:r>
+          </a:p>
+          <a:p>
+            <a:pPr>
+              <a:spcAft>
+                <a:spcPts val="400"/>
+              </a:spcAft>
+            </a:pPr>
+            <a:r>
+              <a:rPr sz="1600" b="0" i="0">
+                <a:solidFill>
+                  <a:srgbClr val="333333"/>
+                </a:solidFill>
+                <a:latin typeface="Calibri"/>
+              </a:rPr>
+              <a:t>Variants and overrides</a:t>
+            </a:r>
+          </a:p>
+          <a:p>
+            <a:pPr>
+              <a:spcAft>
+                <a:spcPts val="400"/>
+              </a:spcAft>
+            </a:pPr>
+            <a:endParaRPr sz="1600" b="0" i="0">
+              <a:solidFill>
+                <a:srgbClr val="333333"/>
+              </a:solidFill>
+              <a:latin typeface="Calibri"/>
+            </a:endParaRPr>
+          </a:p>
+          <a:p>
+            <a:pPr>
+              <a:spcAft>
+                <a:spcPts val="400"/>
+              </a:spcAft>
+            </a:pPr>
+            <a:r>
+              <a:rPr b="1" i="0">
+                <a:solidFill>
+                  <a:srgbClr val="663399"/>
+                </a:solidFill>
+                <a:latin typeface="Calibri"/>
+              </a:rPr>
+              <a:t>Output:</a:t>
+            </a:r>
+          </a:p>
+          <a:p>
+            <a:pPr>
+              <a:spcAft>
+                <a:spcPts val="400"/>
+              </a:spcAft>
+            </a:pPr>
+            <a:r>
+              <a:rPr sz="1600" b="0" i="0">
+                <a:solidFill>
+                  <a:srgbClr val="333333"/>
+                </a:solidFill>
+                <a:latin typeface="Calibri"/>
+              </a:rPr>
+              <a:t>An ordered task graph; sstate is consulted to skip already-built tasks</a:t>
+            </a:r>
+          </a:p>
+        </p:txBody>
+      </p:sp>
+      <p:sp>
+        <p:nvSpPr>
+          <p:cNvPr id="10" name="Rectangle 9"/>
+          <p:cNvSpPr/>
+          <p:nvPr/>
+        </p:nvSpPr>
+        <p:spPr>
+          <a:xfrm>
+            <a:off x="7955279" y="1783080"/>
+            <a:ext cx="3520440" cy="640080"/>
+          </a:xfrm>
+          <a:prstGeom prst="rect">
+            <a:avLst/>
+          </a:prstGeom>
+          <a:solidFill>
+            <a:srgbClr val="CC0066"/>
+          </a:solidFill>
+          <a:ln>
+            <a:noFill/>
+          </a:ln>
+          <a:effectLst/>
+        </p:spPr>
+        <p:style>
+          <a:lnRef idx="1">
+            <a:schemeClr val="accent1"/>
+          </a:lnRef>
+          <a:fillRef idx="3">
+            <a:schemeClr val="accent1"/>
+          </a:fillRef>
+          <a:effectRef idx="2">
+            <a:schemeClr val="accent1"/>
+          </a:effectRef>
+          <a:fontRef idx="minor">
+            <a:schemeClr val="lt1"/>
+          </a:fontRef>
+        </p:style>
+        <p:txBody>
+          <a:bodyPr lIns="182880" rtlCol="0" anchor="ctr"/>
+          <a:lstStyle/>
+          <a:p>
+            <a:pPr algn="ctr"/>
+            <a:r>
+              <a:rPr sz="2000" b="1" dirty="0">
+                <a:solidFill>
+                  <a:srgbClr val="FFFFFF"/>
+                </a:solidFill>
+                <a:latin typeface="Calibri"/>
+              </a:rPr>
+              <a:t>Execute</a:t>
+            </a:r>
+          </a:p>
+          <a:p>
+            <a:r>
+              <a:rPr sz="1600" i="1" dirty="0">
+                <a:solidFill>
+                  <a:srgbClr val="FFFFFF"/>
+                </a:solidFill>
+                <a:latin typeface="Calibri"/>
+              </a:rPr>
+              <a:t>Run tasks</a:t>
+            </a:r>
+          </a:p>
+        </p:txBody>
+      </p:sp>
+      <p:sp>
+        <p:nvSpPr>
+          <p:cNvPr id="11" name="Rectangle 10"/>
+          <p:cNvSpPr/>
+          <p:nvPr/>
+        </p:nvSpPr>
+        <p:spPr>
+          <a:xfrm>
+            <a:off x="7955279" y="2423160"/>
+            <a:ext cx="3520440" cy="3931920"/>
+          </a:xfrm>
+          <a:prstGeom prst="rect">
+            <a:avLst/>
+          </a:prstGeom>
+          <a:solidFill>
+            <a:srgbClr val="FAFAFA"/>
+          </a:solidFill>
+          <a:ln w="6350">
+            <a:solidFill>
+              <a:srgbClr val="CC0066"/>
+            </a:solidFill>
+          </a:ln>
+          <a:effectLst/>
+        </p:spPr>
+        <p:style>
+          <a:lnRef idx="1">
+            <a:schemeClr val="accent1"/>
+          </a:lnRef>
+          <a:fillRef idx="3">
+            <a:schemeClr val="accent1"/>
+          </a:fillRef>
+          <a:effectRef idx="2">
+            <a:schemeClr val="accent1"/>
+          </a:effectRef>
+          <a:fontRef idx="minor">
+            <a:schemeClr val="lt1"/>
+          </a:fontRef>
+        </p:style>
+        <p:txBody>
+          <a:bodyPr rtlCol="0" anchor="ctr"/>
+          <a:lstStyle/>
+          <a:p>
+            <a:pPr algn="ctr"/>
+            <a:endParaRPr/>
+          </a:p>
+        </p:txBody>
+      </p:sp>
+      <p:sp>
+        <p:nvSpPr>
+          <p:cNvPr id="12" name="TextBox 11"/>
+          <p:cNvSpPr txBox="1"/>
+          <p:nvPr/>
+        </p:nvSpPr>
+        <p:spPr>
+          <a:xfrm>
+            <a:off x="8046719" y="2514600"/>
+            <a:ext cx="3337560" cy="2133918"/>
+          </a:xfrm>
+          <a:prstGeom prst="rect">
+            <a:avLst/>
+          </a:prstGeom>
+          <a:noFill/>
+        </p:spPr>
+        <p:txBody>
+          <a:bodyPr wrap="square" lIns="45720" rIns="45720">
+            <a:spAutoFit/>
+          </a:bodyPr>
+          <a:lstStyle/>
+          <a:p>
+            <a:pPr>
+              <a:spcAft>
+                <a:spcPts val="400"/>
+              </a:spcAft>
+            </a:pPr>
+            <a:r>
+              <a:rPr b="1" i="0" dirty="0">
+                <a:solidFill>
+                  <a:srgbClr val="CC0066"/>
+                </a:solidFill>
+                <a:latin typeface="Calibri"/>
+              </a:rPr>
+              <a:t>Runs:</a:t>
+            </a:r>
+          </a:p>
+          <a:p>
+            <a:pPr>
+              <a:spcAft>
+                <a:spcPts val="400"/>
+              </a:spcAft>
+            </a:pPr>
+            <a:r>
+              <a:rPr sz="1600" b="0" i="0" dirty="0">
+                <a:solidFill>
+                  <a:srgbClr val="333333"/>
+                </a:solidFill>
+                <a:latin typeface="Calibri"/>
+              </a:rPr>
+              <a:t>Tasks in parallel where possible</a:t>
+            </a:r>
+          </a:p>
+          <a:p>
+            <a:pPr>
+              <a:spcAft>
+                <a:spcPts val="400"/>
+              </a:spcAft>
+            </a:pPr>
+            <a:r>
+              <a:rPr sz="1600" b="0" i="0" dirty="0">
+                <a:solidFill>
+                  <a:srgbClr val="333333"/>
+                </a:solidFill>
+                <a:latin typeface="Calibri"/>
+              </a:rPr>
+              <a:t>Honoring BB_NUMBER_THREADS</a:t>
+            </a:r>
+          </a:p>
+          <a:p>
+            <a:pPr>
+              <a:spcAft>
+                <a:spcPts val="400"/>
+              </a:spcAft>
+            </a:pPr>
+            <a:endParaRPr sz="1600" b="0" i="0" dirty="0">
+              <a:solidFill>
+                <a:srgbClr val="333333"/>
+              </a:solidFill>
+              <a:latin typeface="Calibri"/>
+            </a:endParaRPr>
+          </a:p>
+          <a:p>
+            <a:pPr>
+              <a:spcAft>
+                <a:spcPts val="400"/>
+              </a:spcAft>
+            </a:pPr>
+            <a:r>
+              <a:rPr b="1" i="0" dirty="0">
+                <a:solidFill>
+                  <a:srgbClr val="CC0066"/>
+                </a:solidFill>
+                <a:latin typeface="Calibri"/>
+              </a:rPr>
+              <a:t>Per task:</a:t>
+            </a:r>
+          </a:p>
+          <a:p>
+            <a:pPr>
+              <a:spcAft>
+                <a:spcPts val="400"/>
+              </a:spcAft>
+            </a:pPr>
+            <a:r>
+              <a:rPr sz="1600" b="0" i="0" dirty="0">
+                <a:solidFill>
+                  <a:srgbClr val="333333"/>
+                </a:solidFill>
+                <a:latin typeface="Calibri"/>
+              </a:rPr>
+              <a:t>Run task function, hash inputs, write outputs, cache in </a:t>
+            </a:r>
+            <a:r>
+              <a:rPr sz="1600" b="0" i="0" dirty="0" err="1">
+                <a:solidFill>
+                  <a:srgbClr val="333333"/>
+                </a:solidFill>
+                <a:latin typeface="Calibri"/>
+              </a:rPr>
+              <a:t>sstate</a:t>
+            </a:r>
+            <a:endParaRPr sz="1600" b="0" i="0" dirty="0">
+              <a:solidFill>
+                <a:srgbClr val="333333"/>
+              </a:solidFill>
+              <a:latin typeface="Calibri"/>
+            </a:endParaRPr>
+          </a:p>
+        </p:txBody>
+      </p:sp>
+    </p:spTree>
+  </p:cSld>
+  <p:clrMapOvr>
+    <a:masterClrMapping/>
+  </p:clrMapOvr>
+</p:sld>
+</file>
+
+<file path=ppt/slides/slide4.xml><?xml version="1.0" encoding="utf-8"?>
+<p:sld xmlns:a="http://schemas.openxmlformats.org/drawingml/2006/main" xmlns:r="http://schemas.openxmlformats.org/officeDocument/2006/relationships" xmlns:p="http://schemas.openxmlformats.org/presentationml/2006/main">
+  <p:cSld>
+    <p:spTree>
+      <p:nvGrpSpPr>
+        <p:cNvPr id="1" name=""/>
+        <p:cNvGrpSpPr/>
+        <p:nvPr/>
+      </p:nvGrpSpPr>
+      <p:grpSpPr>
+        <a:xfrm>
+          <a:off x="0" y="0"/>
+          <a:ext cx="0" cy="0"/>
+          <a:chOff x="0" y="0"/>
+          <a:chExt cx="0" cy="0"/>
+        </a:xfrm>
+      </p:grpSpPr>
+      <p:sp>
+        <p:nvSpPr>
+          <p:cNvPr id="2" name="Title 1"/>
+          <p:cNvSpPr>
+            <a:spLocks noGrp="1"/>
+          </p:cNvSpPr>
+          <p:nvPr>
+            <p:ph type="title"/>
+          </p:nvPr>
+        </p:nvSpPr>
+        <p:spPr/>
+        <p:txBody>
+          <a:bodyPr/>
+          <a:lstStyle/>
+          <a:p>
+            <a:r>
+              <a:rPr sz="3200" b="1" dirty="0">
+                <a:latin typeface="Calibri"/>
+              </a:rPr>
+              <a:t>The Standard Task Chain</a:t>
+            </a:r>
+          </a:p>
+        </p:txBody>
+      </p:sp>
+      <p:sp>
+        <p:nvSpPr>
+          <p:cNvPr id="3" name="TextBox 2"/>
+          <p:cNvSpPr txBox="1"/>
+          <p:nvPr/>
+        </p:nvSpPr>
+        <p:spPr>
+          <a:xfrm>
+            <a:off x="822960" y="1417320"/>
+            <a:ext cx="10515600" cy="338554"/>
+          </a:xfrm>
+          <a:prstGeom prst="rect">
+            <a:avLst/>
+          </a:prstGeom>
+          <a:noFill/>
+        </p:spPr>
+        <p:txBody>
+          <a:bodyPr wrap="square" lIns="45720" rIns="45720" anchor="t">
+            <a:spAutoFit/>
+          </a:bodyPr>
+          <a:lstStyle/>
+          <a:p>
+            <a:pPr algn="l"/>
+            <a:r>
+              <a:rPr sz="1600" b="0" i="1" dirty="0">
                 <a:solidFill>
                   <a:srgbClr val="666666"/>
                 </a:solidFill>
@@ -5290,12 +6564,12 @@
           </a:fontRef>
         </p:style>
         <p:txBody>
-          <a:bodyPr rtlCol="0" anchor="ctr" lIns="18288" rIns="18288"/>
+          <a:bodyPr lIns="18288" rIns="18288" rtlCol="0" anchor="ctr"/>
           <a:lstStyle/>
           <a:p>
             <a:pPr algn="ctr"/>
             <a:r>
-              <a:rPr sz="1100" b="1">
+              <a:rPr b="1">
                 <a:solidFill>
                   <a:srgbClr val="663399"/>
                 </a:solidFill>
@@ -5315,7 +6589,7 @@
         <p:spPr>
           <a:xfrm>
             <a:off x="379476" y="2788920"/>
-            <a:ext cx="1388745" cy="320040"/>
+            <a:ext cx="1388745" cy="276999"/>
           </a:xfrm>
           <a:prstGeom prst="rect">
             <a:avLst/>
@@ -5323,14 +6597,14 @@
           <a:noFill/>
         </p:spPr>
         <p:txBody>
-          <a:bodyPr wrap="square" anchor="t" lIns="45720" rIns="45720">
+          <a:bodyPr wrap="square" lIns="45720" rIns="45720" anchor="t">
             <a:spAutoFit/>
           </a:bodyPr>
           <a:lstStyle/>
           <a:p>
             <a:pPr algn="ctr"/>
             <a:r>
-              <a:rPr sz="900" b="0" i="0">
+              <a:rPr sz="1200" b="0" i="0">
                 <a:solidFill>
                   <a:srgbClr val="666666"/>
                 </a:solidFill>
@@ -5380,12 +6654,12 @@
           </a:fontRef>
         </p:style>
         <p:txBody>
-          <a:bodyPr rtlCol="0" anchor="ctr" lIns="18288" rIns="18288"/>
+          <a:bodyPr lIns="18288" rIns="18288" rtlCol="0" anchor="ctr"/>
           <a:lstStyle/>
           <a:p>
             <a:pPr algn="ctr"/>
             <a:r>
-              <a:rPr sz="1100" b="1">
+              <a:rPr b="1">
                 <a:solidFill>
                   <a:srgbClr val="663399"/>
                 </a:solidFill>
@@ -5405,7 +6679,7 @@
         <p:spPr>
           <a:xfrm>
             <a:off x="1813941" y="2788920"/>
-            <a:ext cx="1388745" cy="320040"/>
+            <a:ext cx="1388745" cy="276999"/>
           </a:xfrm>
           <a:prstGeom prst="rect">
             <a:avLst/>
@@ -5413,14 +6687,14 @@
           <a:noFill/>
         </p:spPr>
         <p:txBody>
-          <a:bodyPr wrap="square" anchor="t" lIns="45720" rIns="45720">
+          <a:bodyPr wrap="square" lIns="45720" rIns="45720" anchor="t">
             <a:spAutoFit/>
           </a:bodyPr>
           <a:lstStyle/>
           <a:p>
             <a:pPr algn="ctr"/>
             <a:r>
-              <a:rPr sz="900" b="0" i="0">
+              <a:rPr sz="1200" b="0" i="0">
                 <a:solidFill>
                   <a:srgbClr val="666666"/>
                 </a:solidFill>
@@ -5470,12 +6744,12 @@
           </a:fontRef>
         </p:style>
         <p:txBody>
-          <a:bodyPr rtlCol="0" anchor="ctr" lIns="18288" rIns="18288"/>
+          <a:bodyPr lIns="18288" rIns="18288" rtlCol="0" anchor="ctr"/>
           <a:lstStyle/>
           <a:p>
             <a:pPr algn="ctr"/>
             <a:r>
-              <a:rPr sz="1100" b="1">
+              <a:rPr b="1">
                 <a:solidFill>
                   <a:srgbClr val="663399"/>
                 </a:solidFill>
@@ -5495,7 +6769,7 @@
         <p:spPr>
           <a:xfrm>
             <a:off x="3248406" y="2788920"/>
-            <a:ext cx="1388745" cy="320040"/>
+            <a:ext cx="1388745" cy="276999"/>
           </a:xfrm>
           <a:prstGeom prst="rect">
             <a:avLst/>
@@ -5503,14 +6777,14 @@
           <a:noFill/>
         </p:spPr>
         <p:txBody>
-          <a:bodyPr wrap="square" anchor="t" lIns="45720" rIns="45720">
+          <a:bodyPr wrap="square" lIns="45720" rIns="45720" anchor="t">
             <a:spAutoFit/>
           </a:bodyPr>
           <a:lstStyle/>
           <a:p>
             <a:pPr algn="ctr"/>
             <a:r>
-              <a:rPr sz="900" b="0" i="0">
+              <a:rPr sz="1200" b="0" i="0">
                 <a:solidFill>
                   <a:srgbClr val="666666"/>
                 </a:solidFill>
@@ -5560,12 +6834,12 @@
           </a:fontRef>
         </p:style>
         <p:txBody>
-          <a:bodyPr rtlCol="0" anchor="ctr" lIns="18288" rIns="18288"/>
+          <a:bodyPr lIns="18288" rIns="18288" rtlCol="0" anchor="ctr"/>
           <a:lstStyle/>
           <a:p>
             <a:pPr algn="ctr"/>
             <a:r>
-              <a:rPr sz="1000" b="1">
+              <a:rPr sz="1400" b="1">
                 <a:solidFill>
                   <a:srgbClr val="663399"/>
                 </a:solidFill>
@@ -5585,7 +6859,7 @@
         <p:spPr>
           <a:xfrm>
             <a:off x="4682871" y="2788920"/>
-            <a:ext cx="1388745" cy="320040"/>
+            <a:ext cx="1388745" cy="276999"/>
           </a:xfrm>
           <a:prstGeom prst="rect">
             <a:avLst/>
@@ -5593,14 +6867,14 @@
           <a:noFill/>
         </p:spPr>
         <p:txBody>
-          <a:bodyPr wrap="square" anchor="t" lIns="45720" rIns="45720">
+          <a:bodyPr wrap="square" lIns="45720" rIns="45720" anchor="t">
             <a:spAutoFit/>
           </a:bodyPr>
           <a:lstStyle/>
           <a:p>
             <a:pPr algn="ctr"/>
             <a:r>
-              <a:rPr sz="900" b="0" i="0">
+              <a:rPr sz="1200" b="0" i="0">
                 <a:solidFill>
                   <a:srgbClr val="666666"/>
                 </a:solidFill>
@@ -5650,12 +6924,12 @@
           </a:fontRef>
         </p:style>
         <p:txBody>
-          <a:bodyPr rtlCol="0" anchor="ctr" lIns="18288" rIns="18288"/>
+          <a:bodyPr lIns="18288" rIns="18288" rtlCol="0" anchor="ctr"/>
           <a:lstStyle/>
           <a:p>
             <a:pPr algn="ctr"/>
             <a:r>
-              <a:rPr sz="1100" b="1">
+              <a:rPr b="1">
                 <a:solidFill>
                   <a:srgbClr val="663399"/>
                 </a:solidFill>
@@ -5675,7 +6949,7 @@
         <p:spPr>
           <a:xfrm>
             <a:off x="6117336" y="2788920"/>
-            <a:ext cx="1388745" cy="320040"/>
+            <a:ext cx="1388745" cy="276999"/>
           </a:xfrm>
           <a:prstGeom prst="rect">
             <a:avLst/>
@@ -5683,14 +6957,14 @@
           <a:noFill/>
         </p:spPr>
         <p:txBody>
-          <a:bodyPr wrap="square" anchor="t" lIns="45720" rIns="45720">
+          <a:bodyPr wrap="square" lIns="45720" rIns="45720" anchor="t">
             <a:spAutoFit/>
           </a:bodyPr>
           <a:lstStyle/>
           <a:p>
             <a:pPr algn="ctr"/>
             <a:r>
-              <a:rPr sz="900" b="0" i="0">
+              <a:rPr sz="1200" b="0" i="0">
                 <a:solidFill>
                   <a:srgbClr val="666666"/>
                 </a:solidFill>
@@ -5740,12 +7014,12 @@
           </a:fontRef>
         </p:style>
         <p:txBody>
-          <a:bodyPr rtlCol="0" anchor="ctr" lIns="18288" rIns="18288"/>
+          <a:bodyPr lIns="18288" rIns="18288" rtlCol="0" anchor="ctr"/>
           <a:lstStyle/>
           <a:p>
             <a:pPr algn="ctr"/>
             <a:r>
-              <a:rPr sz="1100" b="1">
+              <a:rPr b="1">
                 <a:solidFill>
                   <a:srgbClr val="663399"/>
                 </a:solidFill>
@@ -5765,7 +7039,7 @@
         <p:spPr>
           <a:xfrm>
             <a:off x="7551800" y="2788920"/>
-            <a:ext cx="1388745" cy="320040"/>
+            <a:ext cx="1388745" cy="276999"/>
           </a:xfrm>
           <a:prstGeom prst="rect">
             <a:avLst/>
@@ -5773,14 +7047,14 @@
           <a:noFill/>
         </p:spPr>
         <p:txBody>
-          <a:bodyPr wrap="square" anchor="t" lIns="45720" rIns="45720">
+          <a:bodyPr wrap="square" lIns="45720" rIns="45720" anchor="t">
             <a:spAutoFit/>
           </a:bodyPr>
           <a:lstStyle/>
           <a:p>
             <a:pPr algn="ctr"/>
             <a:r>
-              <a:rPr sz="900" b="0" i="0">
+              <a:rPr sz="1200" b="0" i="0">
                 <a:solidFill>
                   <a:srgbClr val="666666"/>
                 </a:solidFill>
@@ -5830,12 +7104,12 @@
           </a:fontRef>
         </p:style>
         <p:txBody>
-          <a:bodyPr rtlCol="0" anchor="ctr" lIns="18288" rIns="18288"/>
+          <a:bodyPr lIns="18288" rIns="18288" rtlCol="0" anchor="ctr"/>
           <a:lstStyle/>
           <a:p>
             <a:pPr algn="ctr"/>
             <a:r>
-              <a:rPr sz="1100" b="1">
+              <a:rPr b="1">
                 <a:solidFill>
                   <a:srgbClr val="663399"/>
                 </a:solidFill>
@@ -5855,7 +7129,7 @@
         <p:spPr>
           <a:xfrm>
             <a:off x="8986266" y="2788920"/>
-            <a:ext cx="1388745" cy="320040"/>
+            <a:ext cx="1388745" cy="276999"/>
           </a:xfrm>
           <a:prstGeom prst="rect">
             <a:avLst/>
@@ -5863,14 +7137,14 @@
           <a:noFill/>
         </p:spPr>
         <p:txBody>
-          <a:bodyPr wrap="square" anchor="t" lIns="45720" rIns="45720">
+          <a:bodyPr wrap="square" lIns="45720" rIns="45720" anchor="t">
             <a:spAutoFit/>
           </a:bodyPr>
           <a:lstStyle/>
           <a:p>
             <a:pPr algn="ctr"/>
             <a:r>
-              <a:rPr sz="900" b="0" i="0">
+              <a:rPr sz="1200" b="0" i="0">
                 <a:solidFill>
                   <a:srgbClr val="666666"/>
                 </a:solidFill>
@@ -5920,12 +7194,12 @@
           </a:fontRef>
         </p:style>
         <p:txBody>
-          <a:bodyPr rtlCol="0" anchor="ctr" lIns="18288" rIns="18288"/>
+          <a:bodyPr lIns="18288" rIns="18288" rtlCol="0" anchor="ctr"/>
           <a:lstStyle/>
           <a:p>
             <a:pPr algn="ctr"/>
             <a:r>
-              <a:rPr sz="1100" b="1">
+              <a:rPr b="1">
                 <a:solidFill>
                   <a:srgbClr val="663399"/>
                 </a:solidFill>
@@ -5945,7 +7219,7 @@
         <p:spPr>
           <a:xfrm>
             <a:off x="10420731" y="2788920"/>
-            <a:ext cx="1388745" cy="320040"/>
+            <a:ext cx="1388745" cy="276999"/>
           </a:xfrm>
           <a:prstGeom prst="rect">
             <a:avLst/>
@@ -5953,14 +7227,14 @@
           <a:noFill/>
         </p:spPr>
         <p:txBody>
-          <a:bodyPr wrap="square" anchor="t" lIns="45720" rIns="45720">
+          <a:bodyPr wrap="square" lIns="45720" rIns="45720" anchor="t">
             <a:spAutoFit/>
           </a:bodyPr>
           <a:lstStyle/>
           <a:p>
             <a:pPr algn="ctr"/>
             <a:r>
-              <a:rPr sz="900" b="0" i="0">
+              <a:rPr sz="1200" b="0" i="0">
                 <a:solidFill>
                   <a:srgbClr val="666666"/>
                 </a:solidFill>
@@ -5979,7 +7253,7 @@
         </p:nvSpPr>
         <p:spPr>
           <a:xfrm>
-            <a:off x="822960" y="3657600"/>
+            <a:off x="379476" y="3092737"/>
             <a:ext cx="10515600" cy="365760"/>
           </a:xfrm>
           <a:prstGeom prst="rect">
@@ -5999,7 +7273,7 @@
               </a:spcAft>
             </a:pPr>
             <a:r>
-              <a:rPr sz="1600" b="1" i="0">
+              <a:rPr sz="1600" b="1" i="0" dirty="0">
                 <a:solidFill>
                   <a:srgbClr val="CC0066"/>
                 </a:solidFill>
@@ -6018,8 +7292,8 @@
         </p:nvSpPr>
         <p:spPr>
           <a:xfrm>
-            <a:off x="822960" y="4069080"/>
-            <a:ext cx="10515600" cy="2286000"/>
+            <a:off x="379476" y="3443748"/>
+            <a:ext cx="10515600" cy="2593258"/>
           </a:xfrm>
           <a:prstGeom prst="roundRect">
             <a:avLst/>
@@ -6053,6 +7327,7 @@
           <a:lstStyle/>
           <a:p>
             <a:pPr algn="ctr"/>
+            <a:endParaRPr/>
           </a:p>
         </p:txBody>
       </p:sp>
@@ -6064,8 +7339,8 @@
         </p:nvSpPr>
         <p:spPr>
           <a:xfrm>
-            <a:off x="822960" y="4069080"/>
-            <a:ext cx="73152" cy="2286000"/>
+            <a:off x="378247" y="3429000"/>
+            <a:ext cx="73152" cy="2593258"/>
           </a:xfrm>
           <a:prstGeom prst="rect">
             <a:avLst/>
@@ -6097,6 +7372,7 @@
           <a:lstStyle/>
           <a:p>
             <a:pPr algn="ctr"/>
+            <a:endParaRPr dirty="0"/>
           </a:p>
         </p:txBody>
       </p:sp>
@@ -6108,8 +7384,8 @@
         </p:nvSpPr>
         <p:spPr>
           <a:xfrm>
-            <a:off x="1005840" y="4160520"/>
-            <a:ext cx="10241280" cy="2103120"/>
+            <a:off x="516636" y="3348810"/>
+            <a:ext cx="10241280" cy="2893100"/>
           </a:xfrm>
           <a:prstGeom prst="rect">
             <a:avLst/>
@@ -6128,7 +7404,7 @@
               </a:spcAft>
             </a:pPr>
             <a:r>
-              <a:rPr sz="1100" i="1">
+              <a:rPr sz="1600" i="1" dirty="0">
                 <a:solidFill>
                   <a:srgbClr val="808080"/>
                 </a:solidFill>
@@ -6144,14 +7420,56 @@
               </a:spcAft>
             </a:pPr>
             <a:r>
-              <a:rPr sz="1100">
+              <a:rPr sz="1600" dirty="0" err="1">
                 <a:solidFill>
                   <a:srgbClr val="2D2D2D"/>
                 </a:solidFill>
                 <a:latin typeface="Consolas"/>
               </a:rPr>
-              <a:t>bitbake busybox -c listtasks</a:t>
-            </a:r>
+              <a:t>bitbake</a:t>
+            </a:r>
+            <a:r>
+              <a:rPr sz="1600" dirty="0">
+                <a:solidFill>
+                  <a:srgbClr val="2D2D2D"/>
+                </a:solidFill>
+                <a:latin typeface="Consolas"/>
+              </a:rPr>
+              <a:t> </a:t>
+            </a:r>
+            <a:r>
+              <a:rPr sz="1600" dirty="0" err="1">
+                <a:solidFill>
+                  <a:srgbClr val="2D2D2D"/>
+                </a:solidFill>
+                <a:latin typeface="Consolas"/>
+              </a:rPr>
+              <a:t>busybox</a:t>
+            </a:r>
+            <a:r>
+              <a:rPr sz="1600" dirty="0">
+                <a:solidFill>
+                  <a:srgbClr val="2D2D2D"/>
+                </a:solidFill>
+                <a:latin typeface="Consolas"/>
+              </a:rPr>
+              <a:t> -c </a:t>
+            </a:r>
+            <a:r>
+              <a:rPr sz="1600" dirty="0" err="1">
+                <a:solidFill>
+                  <a:srgbClr val="2D2D2D"/>
+                </a:solidFill>
+                <a:latin typeface="Consolas"/>
+              </a:rPr>
+              <a:t>listtasks</a:t>
+            </a:r>
+            <a:endParaRPr sz="1600" dirty="0">
+              <a:solidFill>
+                <a:srgbClr val="2D2D2D"/>
+              </a:solidFill>
+              <a:latin typeface="Consolas"/>
+            </a:endParaRPr>
           </a:p>
           <a:p>
             <a:pPr>
@@ -6160,7 +7478,7 @@
               </a:spcAft>
             </a:pPr>
             <a:r>
-              <a:rPr sz="1100">
+              <a:rPr sz="1600" dirty="0">
                 <a:solidFill>
                   <a:srgbClr val="2D2D2D"/>
                 </a:solidFill>
@@ -6176,7 +7494,7 @@
               </a:spcAft>
             </a:pPr>
             <a:r>
-              <a:rPr sz="1100" i="1">
+              <a:rPr sz="1600" i="1" dirty="0">
                 <a:solidFill>
                   <a:srgbClr val="808080"/>
                 </a:solidFill>
@@ -6192,13 +7510,40 @@
               </a:spcAft>
             </a:pPr>
             <a:r>
-              <a:rPr sz="1100">
+              <a:rPr sz="1600" dirty="0" err="1">
                 <a:solidFill>
                   <a:srgbClr val="2D2D2D"/>
                 </a:solidFill>
                 <a:latin typeface="Consolas"/>
               </a:rPr>
-              <a:t>bitbake busybox -c compile</a:t>
+              <a:t>bitbake</a:t>
+            </a:r>
+            <a:r>
+              <a:rPr sz="1600" dirty="0">
+                <a:solidFill>
+                  <a:srgbClr val="2D2D2D"/>
+                </a:solidFill>
+                <a:latin typeface="Consolas"/>
+              </a:rPr>
+              <a:t> </a:t>
+            </a:r>
+            <a:r>
+              <a:rPr sz="1600" dirty="0" err="1">
+                <a:solidFill>
+                  <a:srgbClr val="2D2D2D"/>
+                </a:solidFill>
+                <a:latin typeface="Consolas"/>
+              </a:rPr>
+              <a:t>busybox</a:t>
+            </a:r>
+            <a:r>
+              <a:rPr sz="1600" dirty="0">
+                <a:solidFill>
+                  <a:srgbClr val="2D2D2D"/>
+                </a:solidFill>
+                <a:latin typeface="Consolas"/>
+              </a:rPr>
+              <a:t> -c compile</a:t>
             </a:r>
           </a:p>
           <a:p>
@@ -6208,7 +7553,7 @@
               </a:spcAft>
             </a:pPr>
             <a:r>
-              <a:rPr sz="1100">
+              <a:rPr sz="1600" dirty="0">
                 <a:solidFill>
                   <a:srgbClr val="2D2D2D"/>
                 </a:solidFill>
@@ -6224,7 +7569,7 @@
               </a:spcAft>
             </a:pPr>
             <a:r>
-              <a:rPr sz="1100" i="1">
+              <a:rPr sz="1600" i="1" dirty="0">
                 <a:solidFill>
                   <a:srgbClr val="808080"/>
                 </a:solidFill>
@@ -6240,13 +7585,40 @@
               </a:spcAft>
             </a:pPr>
             <a:r>
-              <a:rPr sz="1100">
+              <a:rPr sz="1600" dirty="0" err="1">
                 <a:solidFill>
                   <a:srgbClr val="2D2D2D"/>
                 </a:solidFill>
                 <a:latin typeface="Consolas"/>
               </a:rPr>
-              <a:t>bitbake busybox -c compile -f</a:t>
+              <a:t>bitbake</a:t>
+            </a:r>
+            <a:r>
+              <a:rPr sz="1600" dirty="0">
+                <a:solidFill>
+                  <a:srgbClr val="2D2D2D"/>
+                </a:solidFill>
+                <a:latin typeface="Consolas"/>
+              </a:rPr>
+              <a:t> </a:t>
+            </a:r>
+            <a:r>
+              <a:rPr sz="1600" dirty="0" err="1">
+                <a:solidFill>
+                  <a:srgbClr val="2D2D2D"/>
+                </a:solidFill>
+                <a:latin typeface="Consolas"/>
+              </a:rPr>
+              <a:t>busybox</a:t>
+            </a:r>
+            <a:r>
+              <a:rPr sz="1600" dirty="0">
+                <a:solidFill>
+                  <a:srgbClr val="2D2D2D"/>
+                </a:solidFill>
+                <a:latin typeface="Consolas"/>
+              </a:rPr>
+              <a:t> -c compile -f</a:t>
             </a:r>
           </a:p>
           <a:p>
@@ -6256,7 +7628,7 @@
               </a:spcAft>
             </a:pPr>
             <a:r>
-              <a:rPr sz="1100">
+              <a:rPr sz="1600" dirty="0">
                 <a:solidFill>
                   <a:srgbClr val="2D2D2D"/>
                 </a:solidFill>
@@ -6272,7 +7644,7 @@
               </a:spcAft>
             </a:pPr>
             <a:r>
-              <a:rPr sz="1100" i="1">
+              <a:rPr sz="1600" i="1" dirty="0">
                 <a:solidFill>
                   <a:srgbClr val="808080"/>
                 </a:solidFill>
@@ -6288,14 +7660,56 @@
               </a:spcAft>
             </a:pPr>
             <a:r>
-              <a:rPr sz="1100">
+              <a:rPr sz="1600" dirty="0" err="1">
                 <a:solidFill>
                   <a:srgbClr val="2D2D2D"/>
                 </a:solidFill>
                 <a:latin typeface="Consolas"/>
               </a:rPr>
-              <a:t>bitbake busybox -c devshell</a:t>
-            </a:r>
+              <a:t>bitbake</a:t>
+            </a:r>
+            <a:r>
+              <a:rPr sz="1600" dirty="0">
+                <a:solidFill>
+                  <a:srgbClr val="2D2D2D"/>
+                </a:solidFill>
+                <a:latin typeface="Consolas"/>
+              </a:rPr>
+              <a:t> </a:t>
+            </a:r>
+            <a:r>
+              <a:rPr sz="1600" dirty="0" err="1">
+                <a:solidFill>
+                  <a:srgbClr val="2D2D2D"/>
+                </a:solidFill>
+                <a:latin typeface="Consolas"/>
+              </a:rPr>
+              <a:t>busybox</a:t>
+            </a:r>
+            <a:r>
+              <a:rPr sz="1600" dirty="0">
+                <a:solidFill>
+                  <a:srgbClr val="2D2D2D"/>
+                </a:solidFill>
+                <a:latin typeface="Consolas"/>
+              </a:rPr>
+              <a:t> -c </a:t>
+            </a:r>
+            <a:r>
+              <a:rPr sz="1600" dirty="0" err="1">
+                <a:solidFill>
+                  <a:srgbClr val="2D2D2D"/>
+                </a:solidFill>
+                <a:latin typeface="Consolas"/>
+              </a:rPr>
+              <a:t>devshell</a:t>
+            </a:r>
+            <a:endParaRPr sz="1600" dirty="0">
+              <a:solidFill>
+                <a:srgbClr val="2D2D2D"/>
+              </a:solidFill>
+              <a:latin typeface="Consolas"/>
+            </a:endParaRPr>
           </a:p>
         </p:txBody>
       </p:sp>
@@ -6307,8 +7721,8 @@
 </p:sld>
 </file>
 
-<file path=ppt/slides/slide11.xml><?xml version="1.0" encoding="utf-8"?>
-<p:sld xmlns:a="http://schemas.openxmlformats.org/drawingml/2006/main" xmlns:p="http://schemas.openxmlformats.org/presentationml/2006/main" xmlns:r="http://schemas.openxmlformats.org/officeDocument/2006/relationships">
+<file path=ppt/slides/slide5.xml><?xml version="1.0" encoding="utf-8"?>
+<p:sld xmlns:a="http://schemas.openxmlformats.org/drawingml/2006/main" xmlns:r="http://schemas.openxmlformats.org/officeDocument/2006/relationships" xmlns:p="http://schemas.openxmlformats.org/presentationml/2006/main">
   <p:cSld>
     <p:spTree>
       <p:nvGrpSpPr>
@@ -6316,7 +7730,14 @@
         <p:cNvGrpSpPr/>
         <p:nvPr/>
       </p:nvGrpSpPr>
-      <p:grpSpPr/>
+      <p:grpSpPr>
+        <a:xfrm>
+          <a:off x="0" y="0"/>
+          <a:ext cx="0" cy="0"/>
+          <a:chOff x="0" y="0"/>
+          <a:chExt cx="0" cy="0"/>
+        </a:xfrm>
+      </p:grpSpPr>
       <p:sp>
         <p:nvSpPr>
           <p:cNvPr id="2" name="Title 1"/>
@@ -6333,10 +7754,7 @@
           <a:lstStyle/>
           <a:p>
             <a:r>
-              <a:rPr sz="3200" b="1">
-                <a:solidFill>
-                  <a:srgbClr val="CC0066"/>
-                </a:solidFill>
+              <a:rPr sz="3200" b="1" dirty="0">
                 <a:latin typeface="Calibri"/>
               </a:rPr>
               <a:t>Variable Assignment Operators</a:t>
@@ -6361,7 +7779,7 @@
           <a:noFill/>
         </p:spPr>
         <p:txBody>
-          <a:bodyPr wrap="square" anchor="t" lIns="45720" rIns="45720">
+          <a:bodyPr wrap="square" lIns="45720" rIns="45720" anchor="t">
             <a:spAutoFit/>
           </a:bodyPr>
           <a:lstStyle/>
@@ -6422,6 +7840,7 @@
           <a:lstStyle/>
           <a:p>
             <a:pPr algn="ctr"/>
+            <a:endParaRPr/>
           </a:p>
         </p:txBody>
       </p:sp>
@@ -6466,6 +7885,7 @@
           <a:lstStyle/>
           <a:p>
             <a:pPr algn="ctr"/>
+            <a:endParaRPr/>
           </a:p>
         </p:txBody>
       </p:sp>
@@ -6477,8 +7897,8 @@
         </p:nvSpPr>
         <p:spPr>
           <a:xfrm>
-            <a:off x="1005840" y="1874519"/>
-            <a:ext cx="10241280" cy="4023359"/>
+            <a:off x="996696" y="1685598"/>
+            <a:ext cx="10241280" cy="4401205"/>
           </a:xfrm>
           <a:prstGeom prst="rect">
             <a:avLst/>
@@ -6497,7 +7917,7 @@
               </a:spcAft>
             </a:pPr>
             <a:r>
-              <a:rPr sz="1100" i="1">
+              <a:rPr sz="1400" i="1">
                 <a:solidFill>
                   <a:srgbClr val="808080"/>
                 </a:solidFill>
@@ -6513,7 +7933,7 @@
               </a:spcAft>
             </a:pPr>
             <a:r>
-              <a:rPr sz="1100">
+              <a:rPr sz="1400">
                 <a:solidFill>
                   <a:srgbClr val="2D2D2D"/>
                 </a:solidFill>
@@ -6529,7 +7949,7 @@
               </a:spcAft>
             </a:pPr>
             <a:r>
-              <a:rPr sz="1100">
+              <a:rPr sz="1400">
                 <a:solidFill>
                   <a:srgbClr val="2D2D2D"/>
                 </a:solidFill>
@@ -6545,7 +7965,7 @@
               </a:spcAft>
             </a:pPr>
             <a:r>
-              <a:rPr sz="1100" i="1">
+              <a:rPr sz="1400" i="1">
                 <a:solidFill>
                   <a:srgbClr val="808080"/>
                 </a:solidFill>
@@ -6561,7 +7981,7 @@
               </a:spcAft>
             </a:pPr>
             <a:r>
-              <a:rPr sz="1100">
+              <a:rPr sz="1400">
                 <a:solidFill>
                   <a:srgbClr val="2D2D2D"/>
                 </a:solidFill>
@@ -6577,7 +7997,7 @@
               </a:spcAft>
             </a:pPr>
             <a:r>
-              <a:rPr sz="1100">
+              <a:rPr sz="1400">
                 <a:solidFill>
                   <a:srgbClr val="2D2D2D"/>
                 </a:solidFill>
@@ -6593,7 +8013,7 @@
               </a:spcAft>
             </a:pPr>
             <a:r>
-              <a:rPr sz="1100" i="1">
+              <a:rPr sz="1400" i="1">
                 <a:solidFill>
                   <a:srgbClr val="808080"/>
                 </a:solidFill>
@@ -6609,7 +8029,7 @@
               </a:spcAft>
             </a:pPr>
             <a:r>
-              <a:rPr sz="1100">
+              <a:rPr sz="1400">
                 <a:solidFill>
                   <a:srgbClr val="2D2D2D"/>
                 </a:solidFill>
@@ -6625,7 +8045,7 @@
               </a:spcAft>
             </a:pPr>
             <a:r>
-              <a:rPr sz="1100">
+              <a:rPr sz="1400">
                 <a:solidFill>
                   <a:srgbClr val="2D2D2D"/>
                 </a:solidFill>
@@ -6641,7 +8061,7 @@
               </a:spcAft>
             </a:pPr>
             <a:r>
-              <a:rPr sz="1100" i="1">
+              <a:rPr sz="1400" i="1">
                 <a:solidFill>
                   <a:srgbClr val="808080"/>
                 </a:solidFill>
@@ -6657,7 +8077,7 @@
               </a:spcAft>
             </a:pPr>
             <a:r>
-              <a:rPr sz="1100">
+              <a:rPr sz="1400">
                 <a:solidFill>
                   <a:srgbClr val="2D2D2D"/>
                 </a:solidFill>
@@ -6673,7 +8093,7 @@
               </a:spcAft>
             </a:pPr>
             <a:r>
-              <a:rPr sz="1100">
+              <a:rPr sz="1400">
                 <a:solidFill>
                   <a:srgbClr val="2D2D2D"/>
                 </a:solidFill>
@@ -6689,7 +8109,7 @@
               </a:spcAft>
             </a:pPr>
             <a:r>
-              <a:rPr sz="1100" i="1">
+              <a:rPr sz="1400" i="1">
                 <a:solidFill>
                   <a:srgbClr val="808080"/>
                 </a:solidFill>
@@ -6705,7 +8125,7 @@
               </a:spcAft>
             </a:pPr>
             <a:r>
-              <a:rPr sz="1100">
+              <a:rPr sz="1400">
                 <a:solidFill>
                   <a:srgbClr val="2D2D2D"/>
                 </a:solidFill>
@@ -6721,7 +8141,7 @@
               </a:spcAft>
             </a:pPr>
             <a:r>
-              <a:rPr sz="1100">
+              <a:rPr sz="1400">
                 <a:solidFill>
                   <a:srgbClr val="2D2D2D"/>
                 </a:solidFill>
@@ -6737,7 +8157,7 @@
               </a:spcAft>
             </a:pPr>
             <a:r>
-              <a:rPr sz="1100" i="1">
+              <a:rPr sz="1400" i="1">
                 <a:solidFill>
                   <a:srgbClr val="808080"/>
                 </a:solidFill>
@@ -6753,7 +8173,7 @@
               </a:spcAft>
             </a:pPr>
             <a:r>
-              <a:rPr sz="1100">
+              <a:rPr sz="1400">
                 <a:solidFill>
                   <a:srgbClr val="2D2D2D"/>
                 </a:solidFill>
@@ -6769,7 +8189,7 @@
               </a:spcAft>
             </a:pPr>
             <a:r>
-              <a:rPr sz="1100">
+              <a:rPr sz="1400">
                 <a:solidFill>
                   <a:srgbClr val="2D2D2D"/>
                 </a:solidFill>
@@ -6785,7 +8205,7 @@
               </a:spcAft>
             </a:pPr>
             <a:r>
-              <a:rPr sz="1100" i="1">
+              <a:rPr sz="1400" i="1">
                 <a:solidFill>
                   <a:srgbClr val="808080"/>
                 </a:solidFill>
@@ -6801,7 +8221,7 @@
               </a:spcAft>
             </a:pPr>
             <a:r>
-              <a:rPr sz="1100">
+              <a:rPr sz="1400">
                 <a:solidFill>
                   <a:srgbClr val="2D2D2D"/>
                 </a:solidFill>
@@ -6820,7 +8240,7 @@
         </p:nvSpPr>
         <p:spPr>
           <a:xfrm>
-            <a:off x="822960" y="6080760"/>
+            <a:off x="822960" y="6123326"/>
             <a:ext cx="10515600" cy="320040"/>
           </a:xfrm>
           <a:prstGeom prst="roundRect">
@@ -6849,12 +8269,12 @@
           </a:fontRef>
         </p:style>
         <p:txBody>
-          <a:bodyPr rtlCol="0" anchor="ctr" lIns="228600" rIns="228600" wrap="square"/>
+          <a:bodyPr wrap="square" lIns="228600" rIns="228600" rtlCol="0" anchor="ctr"/>
           <a:lstStyle/>
           <a:p>
             <a:pPr algn="l"/>
             <a:r>
-              <a:rPr sz="1200" b="1">
+              <a:rPr sz="1600" b="1">
                 <a:solidFill>
                   <a:srgbClr val="663399"/>
                 </a:solidFill>
@@ -6873,8 +8293,8 @@
 </p:sld>
 </file>
 
-<file path=ppt/slides/slide12.xml><?xml version="1.0" encoding="utf-8"?>
-<p:sld xmlns:a="http://schemas.openxmlformats.org/drawingml/2006/main" xmlns:p="http://schemas.openxmlformats.org/presentationml/2006/main" xmlns:r="http://schemas.openxmlformats.org/officeDocument/2006/relationships">
+<file path=ppt/slides/slide6.xml><?xml version="1.0" encoding="utf-8"?>
+<p:sld xmlns:a="http://schemas.openxmlformats.org/drawingml/2006/main" xmlns:r="http://schemas.openxmlformats.org/officeDocument/2006/relationships" xmlns:p="http://schemas.openxmlformats.org/presentationml/2006/main">
   <p:cSld>
     <p:spTree>
       <p:nvGrpSpPr>
@@ -6882,7 +8302,14 @@
         <p:cNvGrpSpPr/>
         <p:nvPr/>
       </p:nvGrpSpPr>
-      <p:grpSpPr/>
+      <p:grpSpPr>
+        <a:xfrm>
+          <a:off x="0" y="0"/>
+          <a:ext cx="0" cy="0"/>
+          <a:chOff x="0" y="0"/>
+          <a:chExt cx="0" cy="0"/>
+        </a:xfrm>
+      </p:grpSpPr>
       <p:sp>
         <p:nvSpPr>
           <p:cNvPr id="2" name="Title 1"/>
@@ -6899,13 +8326,34 @@
           <a:lstStyle/>
           <a:p>
             <a:r>
-              <a:rPr sz="3200" b="1">
-                <a:solidFill>
-                  <a:srgbClr val="CC0066"/>
-                </a:solidFill>
-                <a:latin typeface="Calibri"/>
-              </a:rPr>
-              <a:t>Overrides — How Yocto Picks Variants</a:t>
+              <a:rPr sz="3200" b="1" dirty="0">
+                <a:latin typeface="Calibri"/>
+              </a:rPr>
+              <a:t>Overrides</a:t>
+            </a:r>
+            <a:r>
+              <a:rPr lang="en-IN" sz="3200" b="1" dirty="0">
+                <a:latin typeface="Calibri"/>
+              </a:rPr>
+              <a:t>:</a:t>
+            </a:r>
+            <a:r>
+              <a:rPr sz="3200" b="1" dirty="0">
+                <a:latin typeface="Calibri"/>
+              </a:rPr>
+              <a:t>How </a:t>
+            </a:r>
+            <a:r>
+              <a:rPr sz="3200" b="1" dirty="0" err="1">
+                <a:latin typeface="Calibri"/>
+              </a:rPr>
+              <a:t>Yocto</a:t>
+            </a:r>
+            <a:r>
+              <a:rPr sz="3200" b="1" dirty="0">
+                <a:latin typeface="Calibri"/>
+              </a:rPr>
+              <a:t> Picks Variants</a:t>
             </a:r>
           </a:p>
         </p:txBody>
@@ -6919,7 +8367,7 @@
         <p:spPr>
           <a:xfrm>
             <a:off x="822960" y="1417320"/>
-            <a:ext cx="10515600" cy="365760"/>
+            <a:ext cx="10515600" cy="338554"/>
           </a:xfrm>
           <a:prstGeom prst="rect">
             <a:avLst/>
@@ -6927,14 +8375,14 @@
           <a:noFill/>
         </p:spPr>
         <p:txBody>
-          <a:bodyPr wrap="square" anchor="t" lIns="45720" rIns="45720">
+          <a:bodyPr wrap="square" lIns="45720" rIns="45720" anchor="t">
             <a:spAutoFit/>
           </a:bodyPr>
           <a:lstStyle/>
           <a:p>
             <a:pPr algn="l"/>
             <a:r>
-              <a:rPr sz="1500" b="0" i="1">
+              <a:rPr sz="1600" b="0" i="1" dirty="0">
                 <a:solidFill>
                   <a:srgbClr val="666666"/>
                 </a:solidFill>
@@ -6954,7 +8402,7 @@
         <p:spPr>
           <a:xfrm>
             <a:off x="822960" y="1783080"/>
-            <a:ext cx="10515600" cy="1828800"/>
+            <a:ext cx="10515600" cy="1405513"/>
           </a:xfrm>
           <a:prstGeom prst="rect">
             <a:avLst/>
@@ -6973,7 +8421,7 @@
               </a:spcAft>
             </a:pPr>
             <a:r>
-              <a:rPr sz="1500" b="1" i="0">
+              <a:rPr sz="2000" b="1" i="0" dirty="0">
                 <a:solidFill>
                   <a:srgbClr val="CC0066"/>
                 </a:solidFill>
@@ -6989,7 +8437,7 @@
               </a:spcAft>
             </a:pPr>
             <a:r>
-              <a:rPr sz="1100" b="0" i="0">
+              <a:rPr sz="1600" b="0" i="0" dirty="0">
                 <a:solidFill>
                   <a:srgbClr val="333333"/>
                 </a:solidFill>
@@ -7005,7 +8453,7 @@
               </a:spcAft>
             </a:pPr>
             <a:r>
-              <a:rPr sz="1500" b="1" i="0">
+              <a:rPr sz="2000" b="1" i="0" dirty="0">
                 <a:solidFill>
                   <a:srgbClr val="CC0066"/>
                 </a:solidFill>
@@ -7024,7 +8472,7 @@
         </p:nvSpPr>
         <p:spPr>
           <a:xfrm>
-            <a:off x="822960" y="3657600"/>
+            <a:off x="822960" y="3244645"/>
             <a:ext cx="10515600" cy="2743200"/>
           </a:xfrm>
           <a:prstGeom prst="roundRect">
@@ -7059,6 +8507,7 @@
           <a:lstStyle/>
           <a:p>
             <a:pPr algn="ctr"/>
+            <a:endParaRPr/>
           </a:p>
         </p:txBody>
       </p:sp>
@@ -7070,7 +8519,7 @@
         </p:nvSpPr>
         <p:spPr>
           <a:xfrm>
-            <a:off x="822960" y="3657600"/>
+            <a:off x="822960" y="3244645"/>
             <a:ext cx="73152" cy="2743200"/>
           </a:xfrm>
           <a:prstGeom prst="rect">
@@ -7103,6 +8552,7 @@
           <a:lstStyle/>
           <a:p>
             <a:pPr algn="ctr"/>
+            <a:endParaRPr/>
           </a:p>
         </p:txBody>
       </p:sp>
@@ -7114,8 +8564,8 @@
         </p:nvSpPr>
         <p:spPr>
           <a:xfrm>
-            <a:off x="1005840" y="3749039"/>
-            <a:ext cx="10241280" cy="2560320"/>
+            <a:off x="1005840" y="3336084"/>
+            <a:ext cx="10241280" cy="2554545"/>
           </a:xfrm>
           <a:prstGeom prst="rect">
             <a:avLst/>
@@ -7134,7 +8584,7 @@
               </a:spcAft>
             </a:pPr>
             <a:r>
-              <a:rPr sz="1100" i="1">
+              <a:rPr sz="1600" i="1" dirty="0">
                 <a:solidFill>
                   <a:srgbClr val="808080"/>
                 </a:solidFill>
@@ -7150,7 +8600,7 @@
               </a:spcAft>
             </a:pPr>
             <a:r>
-              <a:rPr sz="1100">
+              <a:rPr sz="1600" dirty="0">
                 <a:solidFill>
                   <a:srgbClr val="2D2D2D"/>
                 </a:solidFill>
@@ -7166,13 +8616,31 @@
               </a:spcAft>
             </a:pPr>
             <a:r>
-              <a:rPr sz="1100">
+              <a:rPr sz="1600" dirty="0">
                 <a:solidFill>
                   <a:srgbClr val="2D2D2D"/>
                 </a:solidFill>
                 <a:latin typeface="Consolas"/>
               </a:rPr>
-              <a:t>EXTRA_OECONF:raspberrypi4-64 = "--enable-foo --with-gpu"</a:t>
+              <a:t>EXTRA_OECONF:raspberrypi4-64 = "--enable-foo --with-</a:t>
+            </a:r>
+            <a:r>
+              <a:rPr sz="1600" dirty="0" err="1">
+                <a:solidFill>
+                  <a:srgbClr val="2D2D2D"/>
+                </a:solidFill>
+                <a:latin typeface="Consolas"/>
+              </a:rPr>
+              <a:t>gpu</a:t>
+            </a:r>
+            <a:r>
+              <a:rPr sz="1600" dirty="0">
+                <a:solidFill>
+                  <a:srgbClr val="2D2D2D"/>
+                </a:solidFill>
+                <a:latin typeface="Consolas"/>
+              </a:rPr>
+              <a:t>"</a:t>
             </a:r>
           </a:p>
           <a:p>
@@ -7182,13 +8650,31 @@
               </a:spcAft>
             </a:pPr>
             <a:r>
-              <a:rPr sz="1100">
+              <a:rPr sz="1600" dirty="0">
                 <a:solidFill>
                   <a:srgbClr val="2D2D2D"/>
                 </a:solidFill>
                 <a:latin typeface="Consolas"/>
               </a:rPr>
-              <a:t>EXTRA_OECONF:qemux86-64 = "--enable-foo --without-gpu"</a:t>
+              <a:t>EXTRA_OECONF:qemux86-64 = "--enable-foo --without-</a:t>
+            </a:r>
+            <a:r>
+              <a:rPr sz="1600" dirty="0" err="1">
+                <a:solidFill>
+                  <a:srgbClr val="2D2D2D"/>
+                </a:solidFill>
+                <a:latin typeface="Consolas"/>
+              </a:rPr>
+              <a:t>gpu</a:t>
+            </a:r>
+            <a:r>
+              <a:rPr sz="1600" dirty="0">
+                <a:solidFill>
+                  <a:srgbClr val="2D2D2D"/>
+                </a:solidFill>
+                <a:latin typeface="Consolas"/>
+              </a:rPr>
+              <a:t>"</a:t>
             </a:r>
           </a:p>
           <a:p>
@@ -7198,7 +8684,7 @@
               </a:spcAft>
             </a:pPr>
             <a:r>
-              <a:rPr sz="1100">
+              <a:rPr sz="1600" dirty="0">
                 <a:solidFill>
                   <a:srgbClr val="2D2D2D"/>
                 </a:solidFill>
@@ -7214,7 +8700,7 @@
               </a:spcAft>
             </a:pPr>
             <a:r>
-              <a:rPr sz="1100" i="1">
+              <a:rPr sz="1600" i="1" dirty="0">
                 <a:solidFill>
                   <a:srgbClr val="808080"/>
                 </a:solidFill>
@@ -7230,13 +8716,40 @@
               </a:spcAft>
             </a:pPr>
             <a:r>
-              <a:rPr sz="1100">
+              <a:rPr sz="1600" dirty="0" err="1">
                 <a:solidFill>
                   <a:srgbClr val="2D2D2D"/>
                 </a:solidFill>
                 <a:latin typeface="Consolas"/>
               </a:rPr>
-              <a:t>PACKAGECONFIG:append = " systemd"</a:t>
+              <a:t>PACKAGECONFIG:append</a:t>
+            </a:r>
+            <a:r>
+              <a:rPr sz="1600" dirty="0">
+                <a:solidFill>
+                  <a:srgbClr val="2D2D2D"/>
+                </a:solidFill>
+                <a:latin typeface="Consolas"/>
+              </a:rPr>
+              <a:t> = " </a:t>
+            </a:r>
+            <a:r>
+              <a:rPr sz="1600" dirty="0" err="1">
+                <a:solidFill>
+                  <a:srgbClr val="2D2D2D"/>
+                </a:solidFill>
+                <a:latin typeface="Consolas"/>
+              </a:rPr>
+              <a:t>systemd</a:t>
+            </a:r>
+            <a:r>
+              <a:rPr sz="1600" dirty="0">
+                <a:solidFill>
+                  <a:srgbClr val="2D2D2D"/>
+                </a:solidFill>
+                <a:latin typeface="Consolas"/>
+              </a:rPr>
+              <a:t>"</a:t>
             </a:r>
           </a:p>
           <a:p>
@@ -7246,7 +8759,7 @@
               </a:spcAft>
             </a:pPr>
             <a:r>
-              <a:rPr sz="1100">
+              <a:rPr sz="1600" dirty="0">
                 <a:solidFill>
                   <a:srgbClr val="2D2D2D"/>
                 </a:solidFill>
@@ -7262,7 +8775,7 @@
               </a:spcAft>
             </a:pPr>
             <a:r>
-              <a:rPr sz="1100" i="1">
+              <a:rPr sz="1600" i="1" dirty="0">
                 <a:solidFill>
                   <a:srgbClr val="808080"/>
                 </a:solidFill>
@@ -7278,13 +8791,22 @@
               </a:spcAft>
             </a:pPr>
             <a:r>
-              <a:rPr sz="1100">
+              <a:rPr sz="1600" dirty="0" err="1">
                 <a:solidFill>
                   <a:srgbClr val="2D2D2D"/>
                 </a:solidFill>
                 <a:latin typeface="Consolas"/>
               </a:rPr>
-              <a:t>CFLAGS:class-native = "-O0 -g"</a:t>
+              <a:t>CFLAGS:class-native</a:t>
+            </a:r>
+            <a:r>
+              <a:rPr sz="1600" dirty="0">
+                <a:solidFill>
+                  <a:srgbClr val="2D2D2D"/>
+                </a:solidFill>
+                <a:latin typeface="Consolas"/>
+              </a:rPr>
+              <a:t> = "-O0 -g"</a:t>
             </a:r>
           </a:p>
         </p:txBody>
@@ -7297,8 +8819,8 @@
 </p:sld>
 </file>
 
-<file path=ppt/slides/slide13.xml><?xml version="1.0" encoding="utf-8"?>
-<p:sld xmlns:a="http://schemas.openxmlformats.org/drawingml/2006/main" xmlns:p="http://schemas.openxmlformats.org/presentationml/2006/main" xmlns:r="http://schemas.openxmlformats.org/officeDocument/2006/relationships">
+<file path=ppt/slides/slide7.xml><?xml version="1.0" encoding="utf-8"?>
+<p:sld xmlns:a="http://schemas.openxmlformats.org/drawingml/2006/main" xmlns:r="http://schemas.openxmlformats.org/officeDocument/2006/relationships" xmlns:p="http://schemas.openxmlformats.org/presentationml/2006/main">
   <p:cSld>
     <p:spTree>
       <p:nvGrpSpPr>
@@ -7306,7 +8828,14 @@
         <p:cNvGrpSpPr/>
         <p:nvPr/>
       </p:nvGrpSpPr>
-      <p:grpSpPr/>
+      <p:grpSpPr>
+        <a:xfrm>
+          <a:off x="0" y="0"/>
+          <a:ext cx="0" cy="0"/>
+          <a:chOff x="0" y="0"/>
+          <a:chExt cx="0" cy="0"/>
+        </a:xfrm>
+      </p:grpSpPr>
       <p:sp>
         <p:nvSpPr>
           <p:cNvPr id="2" name="Title 1"/>
@@ -7323,10 +8852,7 @@
           <a:lstStyle/>
           <a:p>
             <a:r>
-              <a:rPr sz="3200" b="1">
-                <a:solidFill>
-                  <a:srgbClr val="CC0066"/>
-                </a:solidFill>
+              <a:rPr sz="3200" b="1" dirty="0">
                 <a:latin typeface="Calibri"/>
               </a:rPr>
               <a:t>Configuration Files</a:t>
@@ -7343,7 +8869,7 @@
         <p:spPr>
           <a:xfrm>
             <a:off x="822960" y="1417320"/>
-            <a:ext cx="10515600" cy="365760"/>
+            <a:ext cx="10515600" cy="338554"/>
           </a:xfrm>
           <a:prstGeom prst="rect">
             <a:avLst/>
@@ -7351,14 +8877,14 @@
           <a:noFill/>
         </p:spPr>
         <p:txBody>
-          <a:bodyPr wrap="square" anchor="t" lIns="45720" rIns="45720">
+          <a:bodyPr wrap="square" lIns="45720" rIns="45720" anchor="t">
             <a:spAutoFit/>
           </a:bodyPr>
           <a:lstStyle/>
           <a:p>
             <a:pPr algn="l"/>
             <a:r>
-              <a:rPr sz="1500" b="0" i="1">
+              <a:rPr sz="1600" b="0" i="1" dirty="0">
                 <a:solidFill>
                   <a:srgbClr val="666666"/>
                 </a:solidFill>
@@ -7406,12 +8932,12 @@
           </a:fontRef>
         </p:style>
         <p:txBody>
-          <a:bodyPr rtlCol="0" anchor="ctr" lIns="182880"/>
+          <a:bodyPr lIns="182880" rtlCol="0" anchor="ctr"/>
           <a:lstStyle/>
           <a:p>
             <a:pPr algn="ctr"/>
             <a:r>
-              <a:rPr sz="2000" b="1">
+              <a:rPr sz="2000" b="1" dirty="0" err="1">
                 <a:solidFill>
                   <a:srgbClr val="FFFFFF"/>
                 </a:solidFill>
@@ -7419,10 +8945,16 @@
               </a:rPr>
               <a:t>local.conf</a:t>
             </a:r>
-          </a:p>
-          <a:p>
-            <a:r>
-              <a:rPr sz="1200" i="1">
+            <a:endParaRPr sz="2000" b="1" dirty="0">
+              <a:solidFill>
+                <a:srgbClr val="FFFFFF"/>
+              </a:solidFill>
+              <a:latin typeface="Calibri"/>
+            </a:endParaRPr>
+          </a:p>
+          <a:p>
+            <a:r>
+              <a:rPr sz="1600" i="1" dirty="0">
                 <a:solidFill>
                   <a:srgbClr val="FFFFFF"/>
                 </a:solidFill>
@@ -7476,6 +9008,7 @@
           <a:lstStyle/>
           <a:p>
             <a:pPr algn="ctr"/>
+            <a:endParaRPr/>
           </a:p>
         </p:txBody>
       </p:sp>
@@ -7488,7 +9021,7 @@
         <p:spPr>
           <a:xfrm>
             <a:off x="731519" y="2514600"/>
-            <a:ext cx="3337560" cy="3474720"/>
+            <a:ext cx="3337560" cy="3590727"/>
           </a:xfrm>
           <a:prstGeom prst="rect">
             <a:avLst/>
@@ -7507,14 +9040,29 @@
               </a:spcAft>
             </a:pPr>
             <a:r>
-              <a:rPr sz="1100" b="0" i="0">
+              <a:rPr sz="1600" b="0" i="0" dirty="0">
                 <a:solidFill>
                   <a:srgbClr val="333333"/>
                 </a:solidFill>
                 <a:latin typeface="Calibri"/>
               </a:rPr>
-              <a:t>build/conf/local.conf</a:t>
-            </a:r>
+              <a:t>build/conf/</a:t>
+            </a:r>
+            <a:r>
+              <a:rPr sz="1600" b="0" i="0" dirty="0" err="1">
+                <a:solidFill>
+                  <a:srgbClr val="333333"/>
+                </a:solidFill>
+                <a:latin typeface="Calibri"/>
+              </a:rPr>
+              <a:t>local.conf</a:t>
+            </a:r>
+            <a:endParaRPr sz="1600" b="0" i="0" dirty="0">
+              <a:solidFill>
+                <a:srgbClr val="333333"/>
+              </a:solidFill>
+              <a:latin typeface="Calibri"/>
+            </a:endParaRPr>
           </a:p>
           <a:p>
             <a:pPr>
@@ -7522,14 +9070,43 @@
                 <a:spcPts val="400"/>
               </a:spcAft>
             </a:pPr>
-            <a:r>
-              <a:rPr sz="1100" b="0" i="0">
+            <a:endParaRPr sz="1600" b="0" i="0" dirty="0">
+              <a:solidFill>
+                <a:srgbClr val="333333"/>
+              </a:solidFill>
+              <a:latin typeface="Calibri"/>
+            </a:endParaRPr>
+          </a:p>
+          <a:p>
+            <a:pPr>
+              <a:spcAft>
+                <a:spcPts val="400"/>
+              </a:spcAft>
+            </a:pPr>
+            <a:r>
+              <a:rPr b="1" i="0" dirty="0">
+                <a:solidFill>
+                  <a:srgbClr val="CC0066"/>
+                </a:solidFill>
+                <a:latin typeface="Calibri"/>
+              </a:rPr>
+              <a:t>Settings you tune yourself:</a:t>
+            </a:r>
+          </a:p>
+          <a:p>
+            <a:pPr>
+              <a:spcAft>
+                <a:spcPts val="400"/>
+              </a:spcAft>
+            </a:pPr>
+            <a:r>
+              <a:rPr sz="1600" b="0" i="0" dirty="0">
                 <a:solidFill>
                   <a:srgbClr val="333333"/>
                 </a:solidFill>
                 <a:latin typeface="Calibri"/>
               </a:rPr>
-              <a:t/>
+              <a:t>• MACHINE</a:t>
             </a:r>
           </a:p>
           <a:p>
@@ -7539,13 +9116,13 @@
               </a:spcAft>
             </a:pPr>
             <a:r>
-              <a:rPr sz="1200" b="1" i="0">
-                <a:solidFill>
-                  <a:srgbClr val="CC0066"/>
-                </a:solidFill>
-                <a:latin typeface="Calibri"/>
-              </a:rPr>
-              <a:t>Settings you tune yourself:</a:t>
+              <a:rPr sz="1600" b="0" i="0" dirty="0">
+                <a:solidFill>
+                  <a:srgbClr val="333333"/>
+                </a:solidFill>
+                <a:latin typeface="Calibri"/>
+              </a:rPr>
+              <a:t>• DISTRO</a:t>
             </a:r>
           </a:p>
           <a:p>
@@ -7555,13 +9132,13 @@
               </a:spcAft>
             </a:pPr>
             <a:r>
-              <a:rPr sz="1100" b="0" i="0">
+              <a:rPr sz="1600" b="0" i="0" dirty="0">
                 <a:solidFill>
                   <a:srgbClr val="333333"/>
                 </a:solidFill>
                 <a:latin typeface="Calibri"/>
               </a:rPr>
-              <a:t>• MACHINE</a:t>
+              <a:t>• SSTATE_DIR, DL_DIR</a:t>
             </a:r>
           </a:p>
           <a:p>
@@ -7571,13 +9148,13 @@
               </a:spcAft>
             </a:pPr>
             <a:r>
-              <a:rPr sz="1100" b="0" i="0">
+              <a:rPr sz="1600" b="0" i="0" dirty="0">
                 <a:solidFill>
                   <a:srgbClr val="333333"/>
                 </a:solidFill>
                 <a:latin typeface="Calibri"/>
               </a:rPr>
-              <a:t>• DISTRO</a:t>
+              <a:t>• BB_NUMBER_THREADS</a:t>
             </a:r>
           </a:p>
           <a:p>
@@ -7587,13 +9164,13 @@
               </a:spcAft>
             </a:pPr>
             <a:r>
-              <a:rPr sz="1100" b="0" i="0">
+              <a:rPr sz="1600" b="0" i="0" dirty="0">
                 <a:solidFill>
                   <a:srgbClr val="333333"/>
                 </a:solidFill>
                 <a:latin typeface="Calibri"/>
               </a:rPr>
-              <a:t>• SSTATE_DIR, DL_DIR</a:t>
+              <a:t>• PACKAGE_CLASSES</a:t>
             </a:r>
           </a:p>
           <a:p>
@@ -7603,13 +9180,13 @@
               </a:spcAft>
             </a:pPr>
             <a:r>
-              <a:rPr sz="1100" b="0" i="0">
+              <a:rPr sz="1600" b="0" i="0" dirty="0">
                 <a:solidFill>
                   <a:srgbClr val="333333"/>
                 </a:solidFill>
                 <a:latin typeface="Calibri"/>
               </a:rPr>
-              <a:t>• BB_NUMBER_THREADS</a:t>
+              <a:t>• EXTRA_IMAGE_FEATURES</a:t>
             </a:r>
           </a:p>
           <a:p>
@@ -7618,15 +9195,12 @@
                 <a:spcPts val="400"/>
               </a:spcAft>
             </a:pPr>
-            <a:r>
-              <a:rPr sz="1100" b="0" i="0">
-                <a:solidFill>
-                  <a:srgbClr val="333333"/>
-                </a:solidFill>
-                <a:latin typeface="Calibri"/>
-              </a:rPr>
-              <a:t>• PACKAGE_CLASSES</a:t>
-            </a:r>
+            <a:endParaRPr sz="1600" b="0" i="0" dirty="0">
+              <a:solidFill>
+                <a:srgbClr val="333333"/>
+              </a:solidFill>
+              <a:latin typeface="Calibri"/>
+            </a:endParaRPr>
           </a:p>
           <a:p>
             <a:pPr>
@@ -7635,39 +9209,7 @@
               </a:spcAft>
             </a:pPr>
             <a:r>
-              <a:rPr sz="1100" b="0" i="0">
-                <a:solidFill>
-                  <a:srgbClr val="333333"/>
-                </a:solidFill>
-                <a:latin typeface="Calibri"/>
-              </a:rPr>
-              <a:t>• EXTRA_IMAGE_FEATURES</a:t>
-            </a:r>
-          </a:p>
-          <a:p>
-            <a:pPr>
-              <a:spcAft>
-                <a:spcPts val="400"/>
-              </a:spcAft>
-            </a:pPr>
-            <a:r>
-              <a:rPr sz="1100" b="0" i="0">
-                <a:solidFill>
-                  <a:srgbClr val="333333"/>
-                </a:solidFill>
-                <a:latin typeface="Calibri"/>
-              </a:rPr>
-              <a:t/>
-            </a:r>
-          </a:p>
-          <a:p>
-            <a:pPr>
-              <a:spcAft>
-                <a:spcPts val="400"/>
-              </a:spcAft>
-            </a:pPr>
-            <a:r>
-              <a:rPr sz="1100" b="0" i="0">
+              <a:rPr sz="1600" b="0" i="0" dirty="0">
                 <a:solidFill>
                   <a:srgbClr val="333333"/>
                 </a:solidFill>
@@ -7715,12 +9257,12 @@
           </a:fontRef>
         </p:style>
         <p:txBody>
-          <a:bodyPr rtlCol="0" anchor="ctr" lIns="182880"/>
+          <a:bodyPr lIns="182880" rtlCol="0" anchor="ctr"/>
           <a:lstStyle/>
           <a:p>
             <a:pPr algn="ctr"/>
             <a:r>
-              <a:rPr sz="2000" b="1">
+              <a:rPr sz="2000" b="1" dirty="0">
                 <a:solidFill>
                   <a:srgbClr val="FFFFFF"/>
                 </a:solidFill>
@@ -7731,7 +9273,7 @@
           </a:p>
           <a:p>
             <a:r>
-              <a:rPr sz="1200" i="1">
+              <a:rPr sz="1600" i="1" dirty="0">
                 <a:solidFill>
                   <a:srgbClr val="FFFFFF"/>
                 </a:solidFill>
@@ -7785,6 +9327,7 @@
           <a:lstStyle/>
           <a:p>
             <a:pPr algn="ctr"/>
+            <a:endParaRPr/>
           </a:p>
         </p:txBody>
       </p:sp>
@@ -7797,7 +9340,7 @@
         <p:spPr>
           <a:xfrm>
             <a:off x="4389120" y="2514600"/>
-            <a:ext cx="3337560" cy="3474720"/>
+            <a:ext cx="3337560" cy="2995692"/>
           </a:xfrm>
           <a:prstGeom prst="rect">
             <a:avLst/>
@@ -7816,7 +9359,7 @@
               </a:spcAft>
             </a:pPr>
             <a:r>
-              <a:rPr sz="1100" b="0" i="0">
+              <a:rPr sz="1600" b="0" i="0">
                 <a:solidFill>
                   <a:srgbClr val="333333"/>
                 </a:solidFill>
@@ -7831,14 +9374,43 @@
                 <a:spcPts val="400"/>
               </a:spcAft>
             </a:pPr>
-            <a:r>
-              <a:rPr sz="1100" b="0" i="0">
+            <a:endParaRPr sz="1600" b="0" i="0">
+              <a:solidFill>
+                <a:srgbClr val="333333"/>
+              </a:solidFill>
+              <a:latin typeface="Calibri"/>
+            </a:endParaRPr>
+          </a:p>
+          <a:p>
+            <a:pPr>
+              <a:spcAft>
+                <a:spcPts val="400"/>
+              </a:spcAft>
+            </a:pPr>
+            <a:r>
+              <a:rPr b="1" i="0">
+                <a:solidFill>
+                  <a:srgbClr val="663399"/>
+                </a:solidFill>
+                <a:latin typeface="Calibri"/>
+              </a:rPr>
+              <a:t>Settings that apply to your distro:</a:t>
+            </a:r>
+          </a:p>
+          <a:p>
+            <a:pPr>
+              <a:spcAft>
+                <a:spcPts val="400"/>
+              </a:spcAft>
+            </a:pPr>
+            <a:r>
+              <a:rPr sz="1600" b="0" i="0">
                 <a:solidFill>
                   <a:srgbClr val="333333"/>
                 </a:solidFill>
                 <a:latin typeface="Calibri"/>
               </a:rPr>
-              <a:t/>
+              <a:t>• DISTRO_FEATURES</a:t>
             </a:r>
           </a:p>
           <a:p>
@@ -7848,13 +9420,13 @@
               </a:spcAft>
             </a:pPr>
             <a:r>
-              <a:rPr sz="1200" b="1" i="0">
-                <a:solidFill>
-                  <a:srgbClr val="663399"/>
-                </a:solidFill>
-                <a:latin typeface="Calibri"/>
-              </a:rPr>
-              <a:t>Settings that apply to your distro:</a:t>
+              <a:rPr sz="1600" b="0" i="0">
+                <a:solidFill>
+                  <a:srgbClr val="333333"/>
+                </a:solidFill>
+                <a:latin typeface="Calibri"/>
+              </a:rPr>
+              <a:t>• INIT_MANAGER</a:t>
             </a:r>
           </a:p>
           <a:p>
@@ -7864,13 +9436,13 @@
               </a:spcAft>
             </a:pPr>
             <a:r>
-              <a:rPr sz="1100" b="0" i="0">
+              <a:rPr sz="1600" b="0" i="0">
                 <a:solidFill>
                   <a:srgbClr val="333333"/>
                 </a:solidFill>
                 <a:latin typeface="Calibri"/>
               </a:rPr>
-              <a:t>• DISTRO_FEATURES</a:t>
+              <a:t>• PACKAGE_CLASSES</a:t>
             </a:r>
           </a:p>
           <a:p>
@@ -7880,13 +9452,13 @@
               </a:spcAft>
             </a:pPr>
             <a:r>
-              <a:rPr sz="1100" b="0" i="0">
+              <a:rPr sz="1600" b="0" i="0">
                 <a:solidFill>
                   <a:srgbClr val="333333"/>
                 </a:solidFill>
                 <a:latin typeface="Calibri"/>
               </a:rPr>
-              <a:t>• INIT_MANAGER</a:t>
+              <a:t>• LICENSE policy</a:t>
             </a:r>
           </a:p>
           <a:p>
@@ -7895,15 +9467,12 @@
                 <a:spcPts val="400"/>
               </a:spcAft>
             </a:pPr>
-            <a:r>
-              <a:rPr sz="1100" b="0" i="0">
-                <a:solidFill>
-                  <a:srgbClr val="333333"/>
-                </a:solidFill>
-                <a:latin typeface="Calibri"/>
-              </a:rPr>
-              <a:t>• PACKAGE_CLASSES</a:t>
-            </a:r>
+            <a:endParaRPr sz="1600" b="0" i="0">
+              <a:solidFill>
+                <a:srgbClr val="333333"/>
+              </a:solidFill>
+              <a:latin typeface="Calibri"/>
+            </a:endParaRPr>
           </a:p>
           <a:p>
             <a:pPr>
@@ -7912,39 +9481,7 @@
               </a:spcAft>
             </a:pPr>
             <a:r>
-              <a:rPr sz="1100" b="0" i="0">
-                <a:solidFill>
-                  <a:srgbClr val="333333"/>
-                </a:solidFill>
-                <a:latin typeface="Calibri"/>
-              </a:rPr>
-              <a:t>• LICENSE policy</a:t>
-            </a:r>
-          </a:p>
-          <a:p>
-            <a:pPr>
-              <a:spcAft>
-                <a:spcPts val="400"/>
-              </a:spcAft>
-            </a:pPr>
-            <a:r>
-              <a:rPr sz="1100" b="0" i="0">
-                <a:solidFill>
-                  <a:srgbClr val="333333"/>
-                </a:solidFill>
-                <a:latin typeface="Calibri"/>
-              </a:rPr>
-              <a:t/>
-            </a:r>
-          </a:p>
-          <a:p>
-            <a:pPr>
-              <a:spcAft>
-                <a:spcPts val="400"/>
-              </a:spcAft>
-            </a:pPr>
-            <a:r>
-              <a:rPr sz="1100" b="0" i="0">
+              <a:rPr sz="1600" b="0" i="0">
                 <a:solidFill>
                   <a:srgbClr val="333333"/>
                 </a:solidFill>
@@ -7992,12 +9529,12 @@
           </a:fontRef>
         </p:style>
         <p:txBody>
-          <a:bodyPr rtlCol="0" anchor="ctr" lIns="182880"/>
+          <a:bodyPr lIns="182880" rtlCol="0" anchor="ctr"/>
           <a:lstStyle/>
           <a:p>
             <a:pPr algn="ctr"/>
             <a:r>
-              <a:rPr sz="2000" b="1">
+              <a:rPr sz="2000" b="1" dirty="0">
                 <a:solidFill>
                   <a:srgbClr val="FFFFFF"/>
                 </a:solidFill>
@@ -8008,7 +9545,7 @@
           </a:p>
           <a:p>
             <a:r>
-              <a:rPr sz="1200" i="1">
+              <a:rPr sz="1600" i="1" dirty="0">
                 <a:solidFill>
                   <a:srgbClr val="FFFFFF"/>
                 </a:solidFill>
@@ -8062,6 +9599,7 @@
           <a:lstStyle/>
           <a:p>
             <a:pPr algn="ctr"/>
+            <a:endParaRPr/>
           </a:p>
         </p:txBody>
       </p:sp>
@@ -8074,7 +9612,7 @@
         <p:spPr>
           <a:xfrm>
             <a:off x="8046719" y="2514600"/>
-            <a:ext cx="3337560" cy="3474720"/>
+            <a:ext cx="3337560" cy="2995692"/>
           </a:xfrm>
           <a:prstGeom prst="rect">
             <a:avLst/>
@@ -8093,7 +9631,7 @@
               </a:spcAft>
             </a:pPr>
             <a:r>
-              <a:rPr sz="1100" b="0" i="0">
+              <a:rPr sz="1600" b="0" i="0">
                 <a:solidFill>
                   <a:srgbClr val="333333"/>
                 </a:solidFill>
@@ -8108,14 +9646,43 @@
                 <a:spcPts val="400"/>
               </a:spcAft>
             </a:pPr>
-            <a:r>
-              <a:rPr sz="1100" b="0" i="0">
+            <a:endParaRPr sz="1600" b="0" i="0">
+              <a:solidFill>
+                <a:srgbClr val="333333"/>
+              </a:solidFill>
+              <a:latin typeface="Calibri"/>
+            </a:endParaRPr>
+          </a:p>
+          <a:p>
+            <a:pPr>
+              <a:spcAft>
+                <a:spcPts val="400"/>
+              </a:spcAft>
+            </a:pPr>
+            <a:r>
+              <a:rPr b="1" i="0">
+                <a:solidFill>
+                  <a:srgbClr val="CC0066"/>
+                </a:solidFill>
+                <a:latin typeface="Calibri"/>
+              </a:rPr>
+              <a:t>Settings tied to hardware:</a:t>
+            </a:r>
+          </a:p>
+          <a:p>
+            <a:pPr>
+              <a:spcAft>
+                <a:spcPts val="400"/>
+              </a:spcAft>
+            </a:pPr>
+            <a:r>
+              <a:rPr sz="1600" b="0" i="0">
                 <a:solidFill>
                   <a:srgbClr val="333333"/>
                 </a:solidFill>
                 <a:latin typeface="Calibri"/>
               </a:rPr>
-              <a:t/>
+              <a:t>• PREFERRED_PROVIDER for kernel</a:t>
             </a:r>
           </a:p>
           <a:p>
@@ -8125,13 +9692,13 @@
               </a:spcAft>
             </a:pPr>
             <a:r>
-              <a:rPr sz="1200" b="1" i="0">
-                <a:solidFill>
-                  <a:srgbClr val="CC0066"/>
-                </a:solidFill>
-                <a:latin typeface="Calibri"/>
-              </a:rPr>
-              <a:t>Settings tied to hardware:</a:t>
+              <a:rPr sz="1600" b="0" i="0">
+                <a:solidFill>
+                  <a:srgbClr val="333333"/>
+                </a:solidFill>
+                <a:latin typeface="Calibri"/>
+              </a:rPr>
+              <a:t>• KERNEL_DEVICETREE</a:t>
             </a:r>
           </a:p>
           <a:p>
@@ -8141,13 +9708,13 @@
               </a:spcAft>
             </a:pPr>
             <a:r>
-              <a:rPr sz="1100" b="0" i="0">
+              <a:rPr sz="1600" b="0" i="0">
                 <a:solidFill>
                   <a:srgbClr val="333333"/>
                 </a:solidFill>
                 <a:latin typeface="Calibri"/>
               </a:rPr>
-              <a:t>• PREFERRED_PROVIDER for kernel</a:t>
+              <a:t>• MACHINE_FEATURES</a:t>
             </a:r>
           </a:p>
           <a:p>
@@ -8157,13 +9724,13 @@
               </a:spcAft>
             </a:pPr>
             <a:r>
-              <a:rPr sz="1100" b="0" i="0">
+              <a:rPr sz="1600" b="0" i="0">
                 <a:solidFill>
                   <a:srgbClr val="333333"/>
                 </a:solidFill>
                 <a:latin typeface="Calibri"/>
               </a:rPr>
-              <a:t>• KERNEL_DEVICETREE</a:t>
+              <a:t>• Boot args, image format</a:t>
             </a:r>
           </a:p>
           <a:p>
@@ -8172,15 +9739,12 @@
                 <a:spcPts val="400"/>
               </a:spcAft>
             </a:pPr>
-            <a:r>
-              <a:rPr sz="1100" b="0" i="0">
-                <a:solidFill>
-                  <a:srgbClr val="333333"/>
-                </a:solidFill>
-                <a:latin typeface="Calibri"/>
-              </a:rPr>
-              <a:t>• MACHINE_FEATURES</a:t>
-            </a:r>
+            <a:endParaRPr sz="1600" b="0" i="0">
+              <a:solidFill>
+                <a:srgbClr val="333333"/>
+              </a:solidFill>
+              <a:latin typeface="Calibri"/>
+            </a:endParaRPr>
           </a:p>
           <a:p>
             <a:pPr>
@@ -8189,39 +9753,7 @@
               </a:spcAft>
             </a:pPr>
             <a:r>
-              <a:rPr sz="1100" b="0" i="0">
-                <a:solidFill>
-                  <a:srgbClr val="333333"/>
-                </a:solidFill>
-                <a:latin typeface="Calibri"/>
-              </a:rPr>
-              <a:t>• Boot args, image format</a:t>
-            </a:r>
-          </a:p>
-          <a:p>
-            <a:pPr>
-              <a:spcAft>
-                <a:spcPts val="400"/>
-              </a:spcAft>
-            </a:pPr>
-            <a:r>
-              <a:rPr sz="1100" b="0" i="0">
-                <a:solidFill>
-                  <a:srgbClr val="333333"/>
-                </a:solidFill>
-                <a:latin typeface="Calibri"/>
-              </a:rPr>
-              <a:t/>
-            </a:r>
-          </a:p>
-          <a:p>
-            <a:pPr>
-              <a:spcAft>
-                <a:spcPts val="400"/>
-              </a:spcAft>
-            </a:pPr>
-            <a:r>
-              <a:rPr sz="1100" b="0" i="0">
+              <a:rPr sz="1600" b="0" i="0">
                 <a:solidFill>
                   <a:srgbClr val="333333"/>
                 </a:solidFill>
@@ -8269,18 +9801,72 @@
           </a:fontRef>
         </p:style>
         <p:txBody>
-          <a:bodyPr rtlCol="0" anchor="ctr" lIns="228600" rIns="228600" wrap="square"/>
+          <a:bodyPr wrap="square" lIns="228600" rIns="228600" rtlCol="0" anchor="ctr"/>
           <a:lstStyle/>
           <a:p>
             <a:pPr algn="l"/>
             <a:r>
-              <a:rPr sz="1200" b="1">
+              <a:rPr sz="1600" b="1" dirty="0">
                 <a:solidFill>
                   <a:srgbClr val="663399"/>
                 </a:solidFill>
                 <a:latin typeface="Calibri"/>
               </a:rPr>
-              <a:t>Order of application: machine.conf → distro.conf → local.conf. Later files can override earlier.</a:t>
+              <a:t>Order of application: </a:t>
+            </a:r>
+            <a:r>
+              <a:rPr sz="1600" b="1" dirty="0" err="1">
+                <a:solidFill>
+                  <a:srgbClr val="663399"/>
+                </a:solidFill>
+                <a:latin typeface="Calibri"/>
+              </a:rPr>
+              <a:t>machine.conf</a:t>
+            </a:r>
+            <a:r>
+              <a:rPr sz="1600" b="1" dirty="0">
+                <a:solidFill>
+                  <a:srgbClr val="663399"/>
+                </a:solidFill>
+                <a:latin typeface="Calibri"/>
+              </a:rPr>
+              <a:t> → </a:t>
+            </a:r>
+            <a:r>
+              <a:rPr sz="1600" b="1" dirty="0" err="1">
+                <a:solidFill>
+                  <a:srgbClr val="663399"/>
+                </a:solidFill>
+                <a:latin typeface="Calibri"/>
+              </a:rPr>
+              <a:t>distro.conf</a:t>
+            </a:r>
+            <a:r>
+              <a:rPr sz="1600" b="1" dirty="0">
+                <a:solidFill>
+                  <a:srgbClr val="663399"/>
+                </a:solidFill>
+                <a:latin typeface="Calibri"/>
+              </a:rPr>
+              <a:t> → </a:t>
+            </a:r>
+            <a:r>
+              <a:rPr sz="1600" b="1" dirty="0" err="1">
+                <a:solidFill>
+                  <a:srgbClr val="663399"/>
+                </a:solidFill>
+                <a:latin typeface="Calibri"/>
+              </a:rPr>
+              <a:t>local.conf</a:t>
+            </a:r>
+            <a:r>
+              <a:rPr sz="1600" b="1" dirty="0">
+                <a:solidFill>
+                  <a:srgbClr val="663399"/>
+                </a:solidFill>
+                <a:latin typeface="Calibri"/>
+              </a:rPr>
+              <a:t>. Later files can override earlier.</a:t>
             </a:r>
           </a:p>
         </p:txBody>
@@ -8293,8 +9879,8 @@
 </p:sld>
 </file>
 
-<file path=ppt/slides/slide14.xml><?xml version="1.0" encoding="utf-8"?>
-<p:sld xmlns:a="http://schemas.openxmlformats.org/drawingml/2006/main" xmlns:p="http://schemas.openxmlformats.org/presentationml/2006/main" xmlns:r="http://schemas.openxmlformats.org/officeDocument/2006/relationships">
+<file path=ppt/slides/slide8.xml><?xml version="1.0" encoding="utf-8"?>
+<p:sld xmlns:a="http://schemas.openxmlformats.org/drawingml/2006/main" xmlns:r="http://schemas.openxmlformats.org/officeDocument/2006/relationships" xmlns:p="http://schemas.openxmlformats.org/presentationml/2006/main">
   <p:cSld>
     <p:spTree>
       <p:nvGrpSpPr>
@@ -8302,7 +9888,14 @@
         <p:cNvGrpSpPr/>
         <p:nvPr/>
       </p:nvGrpSpPr>
-      <p:grpSpPr/>
+      <p:grpSpPr>
+        <a:xfrm>
+          <a:off x="0" y="0"/>
+          <a:ext cx="0" cy="0"/>
+          <a:chOff x="0" y="0"/>
+          <a:chExt cx="0" cy="0"/>
+        </a:xfrm>
+      </p:grpSpPr>
       <p:sp>
         <p:nvSpPr>
           <p:cNvPr id="2" name="Title 1"/>
@@ -8319,10 +9912,7 @@
           <a:lstStyle/>
           <a:p>
             <a:r>
-              <a:rPr sz="3200" b="1">
-                <a:solidFill>
-                  <a:srgbClr val="CC0066"/>
-                </a:solidFill>
+              <a:rPr sz="3200" b="1" dirty="0">
                 <a:latin typeface="Calibri"/>
               </a:rPr>
               <a:t>Inspection Toolkit</a:t>
@@ -8339,7 +9929,7 @@
         <p:spPr>
           <a:xfrm>
             <a:off x="822960" y="1417320"/>
-            <a:ext cx="10515600" cy="365760"/>
+            <a:ext cx="10515600" cy="338554"/>
           </a:xfrm>
           <a:prstGeom prst="rect">
             <a:avLst/>
@@ -8347,20 +9937,38 @@
           <a:noFill/>
         </p:spPr>
         <p:txBody>
-          <a:bodyPr wrap="square" anchor="t" lIns="45720" rIns="45720">
+          <a:bodyPr wrap="square" lIns="45720" rIns="45720" anchor="t">
             <a:spAutoFit/>
           </a:bodyPr>
           <a:lstStyle/>
           <a:p>
             <a:pPr algn="l"/>
             <a:r>
-              <a:rPr sz="1500" b="0" i="1">
+              <a:rPr sz="1600" b="0" i="1" dirty="0">
                 <a:solidFill>
                   <a:srgbClr val="666666"/>
                 </a:solidFill>
                 <a:latin typeface="Calibri"/>
               </a:rPr>
-              <a:t>Commands you will run constantly to understand what BitBake is doing.</a:t>
+              <a:t>Commands you will run constantly to understand what </a:t>
+            </a:r>
+            <a:r>
+              <a:rPr sz="1600" b="0" i="1" dirty="0" err="1">
+                <a:solidFill>
+                  <a:srgbClr val="666666"/>
+                </a:solidFill>
+                <a:latin typeface="Calibri"/>
+              </a:rPr>
+              <a:t>BitBake</a:t>
+            </a:r>
+            <a:r>
+              <a:rPr sz="1600" b="0" i="1" dirty="0">
+                <a:solidFill>
+                  <a:srgbClr val="666666"/>
+                </a:solidFill>
+                <a:latin typeface="Calibri"/>
+              </a:rPr>
+              <a:t> is doing.</a:t>
             </a:r>
           </a:p>
         </p:txBody>
@@ -8408,6 +10016,7 @@
           <a:lstStyle/>
           <a:p>
             <a:pPr algn="ctr"/>
+            <a:endParaRPr/>
           </a:p>
         </p:txBody>
       </p:sp>
@@ -8452,6 +10061,7 @@
           <a:lstStyle/>
           <a:p>
             <a:pPr algn="ctr"/>
+            <a:endParaRPr/>
           </a:p>
         </p:txBody>
       </p:sp>
@@ -8464,7 +10074,7 @@
         <p:spPr>
           <a:xfrm>
             <a:off x="1005840" y="1874519"/>
-            <a:ext cx="10241280" cy="4389120"/>
+            <a:ext cx="10241280" cy="4524315"/>
           </a:xfrm>
           <a:prstGeom prst="rect">
             <a:avLst/>
@@ -8483,7 +10093,7 @@
               </a:spcAft>
             </a:pPr>
             <a:r>
-              <a:rPr sz="1100" i="1">
+              <a:rPr sz="1600" i="1" dirty="0">
                 <a:solidFill>
                   <a:srgbClr val="808080"/>
                 </a:solidFill>
@@ -8499,14 +10109,56 @@
               </a:spcAft>
             </a:pPr>
             <a:r>
-              <a:rPr sz="1100">
+              <a:rPr sz="1600" dirty="0" err="1">
                 <a:solidFill>
                   <a:srgbClr val="2D2D2D"/>
                 </a:solidFill>
                 <a:latin typeface="Consolas"/>
               </a:rPr>
-              <a:t>bitbake -e busybox &gt; busybox.env</a:t>
-            </a:r>
+              <a:t>bitbake</a:t>
+            </a:r>
+            <a:r>
+              <a:rPr sz="1600" dirty="0">
+                <a:solidFill>
+                  <a:srgbClr val="2D2D2D"/>
+                </a:solidFill>
+                <a:latin typeface="Consolas"/>
+              </a:rPr>
+              <a:t> -e </a:t>
+            </a:r>
+            <a:r>
+              <a:rPr sz="1600" dirty="0" err="1">
+                <a:solidFill>
+                  <a:srgbClr val="2D2D2D"/>
+                </a:solidFill>
+                <a:latin typeface="Consolas"/>
+              </a:rPr>
+              <a:t>busybox</a:t>
+            </a:r>
+            <a:r>
+              <a:rPr sz="1600" dirty="0">
+                <a:solidFill>
+                  <a:srgbClr val="2D2D2D"/>
+                </a:solidFill>
+                <a:latin typeface="Consolas"/>
+              </a:rPr>
+              <a:t> &gt; </a:t>
+            </a:r>
+            <a:r>
+              <a:rPr sz="1600" dirty="0" err="1">
+                <a:solidFill>
+                  <a:srgbClr val="2D2D2D"/>
+                </a:solidFill>
+                <a:latin typeface="Consolas"/>
+              </a:rPr>
+              <a:t>busybox.env</a:t>
+            </a:r>
+            <a:endParaRPr sz="1600" dirty="0">
+              <a:solidFill>
+                <a:srgbClr val="2D2D2D"/>
+              </a:solidFill>
+              <a:latin typeface="Consolas"/>
+            </a:endParaRPr>
           </a:p>
           <a:p>
             <a:pPr>
@@ -8515,14 +10167,29 @@
               </a:spcAft>
             </a:pPr>
             <a:r>
-              <a:rPr sz="1100">
+              <a:rPr sz="1600" dirty="0">
                 <a:solidFill>
                   <a:srgbClr val="2D2D2D"/>
                 </a:solidFill>
                 <a:latin typeface="Consolas"/>
               </a:rPr>
-              <a:t>less busybox.env</a:t>
-            </a:r>
+              <a:t>less </a:t>
+            </a:r>
+            <a:r>
+              <a:rPr sz="1600" dirty="0" err="1">
+                <a:solidFill>
+                  <a:srgbClr val="2D2D2D"/>
+                </a:solidFill>
+                <a:latin typeface="Consolas"/>
+              </a:rPr>
+              <a:t>busybox.env</a:t>
+            </a:r>
+            <a:endParaRPr sz="1600" dirty="0">
+              <a:solidFill>
+                <a:srgbClr val="2D2D2D"/>
+              </a:solidFill>
+              <a:latin typeface="Consolas"/>
+            </a:endParaRPr>
           </a:p>
           <a:p>
             <a:pPr>
@@ -8531,7 +10198,7 @@
               </a:spcAft>
             </a:pPr>
             <a:r>
-              <a:rPr sz="1100">
+              <a:rPr sz="1600" dirty="0">
                 <a:solidFill>
                   <a:srgbClr val="2D2D2D"/>
                 </a:solidFill>
@@ -8547,7 +10214,7 @@
               </a:spcAft>
             </a:pPr>
             <a:r>
-              <a:rPr sz="1100" i="1">
+              <a:rPr sz="1600" i="1" dirty="0">
                 <a:solidFill>
                   <a:srgbClr val="808080"/>
                 </a:solidFill>
@@ -8563,13 +10230,22 @@
               </a:spcAft>
             </a:pPr>
             <a:r>
-              <a:rPr sz="1100">
+              <a:rPr sz="1600" dirty="0" err="1">
                 <a:solidFill>
                   <a:srgbClr val="2D2D2D"/>
                 </a:solidFill>
                 <a:latin typeface="Consolas"/>
               </a:rPr>
-              <a:t>bitbake -g core-image-base</a:t>
+              <a:t>bitbake</a:t>
+            </a:r>
+            <a:r>
+              <a:rPr sz="1600" dirty="0">
+                <a:solidFill>
+                  <a:srgbClr val="2D2D2D"/>
+                </a:solidFill>
+                <a:latin typeface="Consolas"/>
+              </a:rPr>
+              <a:t> -g core-image-base</a:t>
             </a:r>
           </a:p>
           <a:p>
@@ -8579,13 +10255,40 @@
               </a:spcAft>
             </a:pPr>
             <a:r>
-              <a:rPr sz="1100">
+              <a:rPr sz="1600" dirty="0" err="1">
                 <a:solidFill>
                   <a:srgbClr val="2D2D2D"/>
                 </a:solidFill>
                 <a:latin typeface="Consolas"/>
               </a:rPr>
-              <a:t>bitbake -g -u taskexp core-image-base    # interactive viewer</a:t>
+              <a:t>bitbake</a:t>
+            </a:r>
+            <a:r>
+              <a:rPr sz="1600" dirty="0">
+                <a:solidFill>
+                  <a:srgbClr val="2D2D2D"/>
+                </a:solidFill>
+                <a:latin typeface="Consolas"/>
+              </a:rPr>
+              <a:t> -g -u </a:t>
+            </a:r>
+            <a:r>
+              <a:rPr sz="1600" dirty="0" err="1">
+                <a:solidFill>
+                  <a:srgbClr val="2D2D2D"/>
+                </a:solidFill>
+                <a:latin typeface="Consolas"/>
+              </a:rPr>
+              <a:t>taskexp</a:t>
+            </a:r>
+            <a:r>
+              <a:rPr sz="1600" dirty="0">
+                <a:solidFill>
+                  <a:srgbClr val="2D2D2D"/>
+                </a:solidFill>
+                <a:latin typeface="Consolas"/>
+              </a:rPr>
+              <a:t> core-image-base    # interactive viewer</a:t>
             </a:r>
           </a:p>
           <a:p>
@@ -8595,7 +10298,7 @@
               </a:spcAft>
             </a:pPr>
             <a:r>
-              <a:rPr sz="1100">
+              <a:rPr sz="1600" dirty="0">
                 <a:solidFill>
                   <a:srgbClr val="2D2D2D"/>
                 </a:solidFill>
@@ -8611,7 +10314,7 @@
               </a:spcAft>
             </a:pPr>
             <a:r>
-              <a:rPr sz="1100" i="1">
+              <a:rPr sz="1600" i="1" dirty="0">
                 <a:solidFill>
                   <a:srgbClr val="808080"/>
                 </a:solidFill>
@@ -8627,13 +10330,22 @@
               </a:spcAft>
             </a:pPr>
             <a:r>
-              <a:rPr sz="1100">
+              <a:rPr sz="1600" dirty="0" err="1">
                 <a:solidFill>
                   <a:srgbClr val="2D2D2D"/>
                 </a:solidFill>
                 <a:latin typeface="Consolas"/>
               </a:rPr>
-              <a:t>bitbake-layers show-layers</a:t>
+              <a:t>bitbake</a:t>
+            </a:r>
+            <a:r>
+              <a:rPr sz="1600" dirty="0">
+                <a:solidFill>
+                  <a:srgbClr val="2D2D2D"/>
+                </a:solidFill>
+                <a:latin typeface="Consolas"/>
+              </a:rPr>
+              <a:t>-layers show-layers</a:t>
             </a:r>
           </a:p>
           <a:p>
@@ -8643,14 +10355,38 @@
               </a:spcAft>
             </a:pPr>
             <a:r>
-              <a:rPr sz="1100">
+              <a:rPr sz="1600" dirty="0" err="1">
                 <a:solidFill>
                   <a:srgbClr val="2D2D2D"/>
                 </a:solidFill>
                 <a:latin typeface="Consolas"/>
               </a:rPr>
-              <a:t>bitbake-layers show-recipes busybox</a:t>
-            </a:r>
+              <a:t>bitbake</a:t>
+            </a:r>
+            <a:r>
+              <a:rPr sz="1600" dirty="0">
+                <a:solidFill>
+                  <a:srgbClr val="2D2D2D"/>
+                </a:solidFill>
+                <a:latin typeface="Consolas"/>
+              </a:rPr>
+              <a:t>-layers show-recipes </a:t>
+            </a:r>
+            <a:r>
+              <a:rPr sz="1600" dirty="0" err="1">
+                <a:solidFill>
+                  <a:srgbClr val="2D2D2D"/>
+                </a:solidFill>
+                <a:latin typeface="Consolas"/>
+              </a:rPr>
+              <a:t>busybox</a:t>
+            </a:r>
+            <a:endParaRPr sz="1600" dirty="0">
+              <a:solidFill>
+                <a:srgbClr val="2D2D2D"/>
+              </a:solidFill>
+              <a:latin typeface="Consolas"/>
+            </a:endParaRPr>
           </a:p>
           <a:p>
             <a:pPr>
@@ -8659,13 +10395,22 @@
               </a:spcAft>
             </a:pPr>
             <a:r>
-              <a:rPr sz="1100">
+              <a:rPr sz="1600" dirty="0" err="1">
                 <a:solidFill>
                   <a:srgbClr val="2D2D2D"/>
                 </a:solidFill>
                 <a:latin typeface="Consolas"/>
               </a:rPr>
-              <a:t>bitbake-layers show-overlayed</a:t>
+              <a:t>bitbake</a:t>
+            </a:r>
+            <a:r>
+              <a:rPr sz="1600" dirty="0">
+                <a:solidFill>
+                  <a:srgbClr val="2D2D2D"/>
+                </a:solidFill>
+                <a:latin typeface="Consolas"/>
+              </a:rPr>
+              <a:t>-layers show-overlayed</a:t>
             </a:r>
           </a:p>
           <a:p>
@@ -8675,7 +10420,7 @@
               </a:spcAft>
             </a:pPr>
             <a:r>
-              <a:rPr sz="1100">
+              <a:rPr sz="1600" dirty="0">
                 <a:solidFill>
                   <a:srgbClr val="2D2D2D"/>
                 </a:solidFill>
@@ -8691,7 +10436,7 @@
               </a:spcAft>
             </a:pPr>
             <a:r>
-              <a:rPr sz="1100" i="1">
+              <a:rPr sz="1600" i="1" dirty="0">
                 <a:solidFill>
                   <a:srgbClr val="808080"/>
                 </a:solidFill>
@@ -8707,14 +10452,56 @@
               </a:spcAft>
             </a:pPr>
             <a:r>
-              <a:rPr sz="1100">
+              <a:rPr sz="1600" dirty="0" err="1">
                 <a:solidFill>
                   <a:srgbClr val="2D2D2D"/>
                 </a:solidFill>
                 <a:latin typeface="Consolas"/>
               </a:rPr>
-              <a:t>bitbake-diffsigs old.sig new.sig</a:t>
-            </a:r>
+              <a:t>bitbake-diffsigs</a:t>
+            </a:r>
+            <a:r>
+              <a:rPr sz="1600" dirty="0">
+                <a:solidFill>
+                  <a:srgbClr val="2D2D2D"/>
+                </a:solidFill>
+                <a:latin typeface="Consolas"/>
+              </a:rPr>
+              <a:t> </a:t>
+            </a:r>
+            <a:r>
+              <a:rPr sz="1600" dirty="0" err="1">
+                <a:solidFill>
+                  <a:srgbClr val="2D2D2D"/>
+                </a:solidFill>
+                <a:latin typeface="Consolas"/>
+              </a:rPr>
+              <a:t>old.sig</a:t>
+            </a:r>
+            <a:r>
+              <a:rPr sz="1600" dirty="0">
+                <a:solidFill>
+                  <a:srgbClr val="2D2D2D"/>
+                </a:solidFill>
+                <a:latin typeface="Consolas"/>
+              </a:rPr>
+              <a:t> </a:t>
+            </a:r>
+            <a:r>
+              <a:rPr sz="1600" dirty="0" err="1">
+                <a:solidFill>
+                  <a:srgbClr val="2D2D2D"/>
+                </a:solidFill>
+                <a:latin typeface="Consolas"/>
+              </a:rPr>
+              <a:t>new.sig</a:t>
+            </a:r>
+            <a:endParaRPr sz="1600" dirty="0">
+              <a:solidFill>
+                <a:srgbClr val="2D2D2D"/>
+              </a:solidFill>
+              <a:latin typeface="Consolas"/>
+            </a:endParaRPr>
           </a:p>
           <a:p>
             <a:pPr>
@@ -8723,7 +10510,7 @@
               </a:spcAft>
             </a:pPr>
             <a:r>
-              <a:rPr sz="1100">
+              <a:rPr sz="1600" dirty="0">
                 <a:solidFill>
                   <a:srgbClr val="2D2D2D"/>
                 </a:solidFill>
@@ -8739,7 +10526,7 @@
               </a:spcAft>
             </a:pPr>
             <a:r>
-              <a:rPr sz="1100" i="1">
+              <a:rPr sz="1600" i="1" dirty="0">
                 <a:solidFill>
                   <a:srgbClr val="808080"/>
                 </a:solidFill>
@@ -8755,14 +10542,56 @@
               </a:spcAft>
             </a:pPr>
             <a:r>
-              <a:rPr sz="1100">
+              <a:rPr sz="1600" dirty="0" err="1">
                 <a:solidFill>
                   <a:srgbClr val="2D2D2D"/>
                 </a:solidFill>
                 <a:latin typeface="Consolas"/>
               </a:rPr>
-              <a:t>bitbake -g busybox -u depgraph</a:t>
-            </a:r>
+              <a:t>bitbake</a:t>
+            </a:r>
+            <a:r>
+              <a:rPr sz="1600" dirty="0">
+                <a:solidFill>
+                  <a:srgbClr val="2D2D2D"/>
+                </a:solidFill>
+                <a:latin typeface="Consolas"/>
+              </a:rPr>
+              <a:t> -g </a:t>
+            </a:r>
+            <a:r>
+              <a:rPr sz="1600" dirty="0" err="1">
+                <a:solidFill>
+                  <a:srgbClr val="2D2D2D"/>
+                </a:solidFill>
+                <a:latin typeface="Consolas"/>
+              </a:rPr>
+              <a:t>busybox</a:t>
+            </a:r>
+            <a:r>
+              <a:rPr sz="1600" dirty="0">
+                <a:solidFill>
+                  <a:srgbClr val="2D2D2D"/>
+                </a:solidFill>
+                <a:latin typeface="Consolas"/>
+              </a:rPr>
+              <a:t> -u </a:t>
+            </a:r>
+            <a:r>
+              <a:rPr sz="1600" dirty="0" err="1">
+                <a:solidFill>
+                  <a:srgbClr val="2D2D2D"/>
+                </a:solidFill>
+                <a:latin typeface="Consolas"/>
+              </a:rPr>
+              <a:t>depgraph</a:t>
+            </a:r>
+            <a:endParaRPr sz="1600" dirty="0">
+              <a:solidFill>
+                <a:srgbClr val="2D2D2D"/>
+              </a:solidFill>
+              <a:latin typeface="Consolas"/>
+            </a:endParaRPr>
           </a:p>
         </p:txBody>
       </p:sp>
@@ -8774,8 +10603,8 @@
 </p:sld>
 </file>
 
-<file path=ppt/slides/slide15.xml><?xml version="1.0" encoding="utf-8"?>
-<p:sld xmlns:a="http://schemas.openxmlformats.org/drawingml/2006/main" xmlns:p="http://schemas.openxmlformats.org/presentationml/2006/main" xmlns:r="http://schemas.openxmlformats.org/officeDocument/2006/relationships">
+<file path=ppt/slides/slide9.xml><?xml version="1.0" encoding="utf-8"?>
+<p:sld xmlns:a="http://schemas.openxmlformats.org/drawingml/2006/main" xmlns:r="http://schemas.openxmlformats.org/officeDocument/2006/relationships" xmlns:p="http://schemas.openxmlformats.org/presentationml/2006/main">
   <p:cSld>
     <p:spTree>
       <p:nvGrpSpPr>
@@ -8783,7 +10612,14 @@
         <p:cNvGrpSpPr/>
         <p:nvPr/>
       </p:nvGrpSpPr>
-      <p:grpSpPr/>
+      <p:grpSpPr>
+        <a:xfrm>
+          <a:off x="0" y="0"/>
+          <a:ext cx="0" cy="0"/>
+          <a:chOff x="0" y="0"/>
+          <a:chExt cx="0" cy="0"/>
+        </a:xfrm>
+      </p:grpSpPr>
       <p:sp>
         <p:nvSpPr>
           <p:cNvPr id="2" name="Title 1"/>
@@ -8828,7 +10664,7 @@
           <a:noFill/>
         </p:spPr>
         <p:txBody>
-          <a:bodyPr wrap="square" anchor="t" lIns="45720" rIns="45720">
+          <a:bodyPr wrap="square" lIns="45720" rIns="45720" anchor="t">
             <a:spAutoFit/>
           </a:bodyPr>
           <a:lstStyle/>
@@ -8883,7 +10719,7 @@
           </a:fontRef>
         </p:style>
         <p:txBody>
-          <a:bodyPr rtlCol="0" anchor="ctr" lIns="0" rIns="0"/>
+          <a:bodyPr lIns="0" rIns="0" rtlCol="0" anchor="ctr"/>
           <a:lstStyle/>
           <a:p>
             <a:pPr algn="ctr"/>
@@ -8916,7 +10752,7 @@
           <a:noFill/>
         </p:spPr>
         <p:txBody>
-          <a:bodyPr wrap="square" anchor="t" lIns="45720" rIns="45720">
+          <a:bodyPr wrap="square" lIns="45720" rIns="45720" anchor="t">
             <a:spAutoFit/>
           </a:bodyPr>
           <a:lstStyle/>
@@ -8951,7 +10787,7 @@
           <a:noFill/>
         </p:spPr>
         <p:txBody>
-          <a:bodyPr wrap="square" anchor="t" lIns="45720" rIns="45720">
+          <a:bodyPr wrap="square" lIns="45720" rIns="45720" anchor="t">
             <a:spAutoFit/>
           </a:bodyPr>
           <a:lstStyle/>
@@ -9006,7 +10842,7 @@
           </a:fontRef>
         </p:style>
         <p:txBody>
-          <a:bodyPr rtlCol="0" anchor="ctr" lIns="0" rIns="0"/>
+          <a:bodyPr lIns="0" rIns="0" rtlCol="0" anchor="ctr"/>
           <a:lstStyle/>
           <a:p>
             <a:pPr algn="ctr"/>
@@ -9039,7 +10875,7 @@
           <a:noFill/>
         </p:spPr>
         <p:txBody>
-          <a:bodyPr wrap="square" anchor="t" lIns="45720" rIns="45720">
+          <a:bodyPr wrap="square" lIns="45720" rIns="45720" anchor="t">
             <a:spAutoFit/>
           </a:bodyPr>
           <a:lstStyle/>
@@ -9074,7 +10910,7 @@
           <a:noFill/>
         </p:spPr>
         <p:txBody>
-          <a:bodyPr wrap="square" anchor="t" lIns="45720" rIns="45720">
+          <a:bodyPr wrap="square" lIns="45720" rIns="45720" anchor="t">
             <a:spAutoFit/>
           </a:bodyPr>
           <a:lstStyle/>
@@ -9129,7 +10965,7 @@
           </a:fontRef>
         </p:style>
         <p:txBody>
-          <a:bodyPr rtlCol="0" anchor="ctr" lIns="0" rIns="0"/>
+          <a:bodyPr lIns="0" rIns="0" rtlCol="0" anchor="ctr"/>
           <a:lstStyle/>
           <a:p>
             <a:pPr algn="ctr"/>
@@ -9162,7 +10998,7 @@
           <a:noFill/>
         </p:spPr>
         <p:txBody>
-          <a:bodyPr wrap="square" anchor="t" lIns="45720" rIns="45720">
+          <a:bodyPr wrap="square" lIns="45720" rIns="45720" anchor="t">
             <a:spAutoFit/>
           </a:bodyPr>
           <a:lstStyle/>
@@ -9197,7 +11033,7 @@
           <a:noFill/>
         </p:spPr>
         <p:txBody>
-          <a:bodyPr wrap="square" anchor="t" lIns="45720" rIns="45720">
+          <a:bodyPr wrap="square" lIns="45720" rIns="45720" anchor="t">
             <a:spAutoFit/>
           </a:bodyPr>
           <a:lstStyle/>
@@ -9252,7 +11088,7 @@
           </a:fontRef>
         </p:style>
         <p:txBody>
-          <a:bodyPr rtlCol="0" anchor="ctr" lIns="0" rIns="0"/>
+          <a:bodyPr lIns="0" rIns="0" rtlCol="0" anchor="ctr"/>
           <a:lstStyle/>
           <a:p>
             <a:pPr algn="ctr"/>
@@ -9285,7 +11121,7 @@
           <a:noFill/>
         </p:spPr>
         <p:txBody>
-          <a:bodyPr wrap="square" anchor="t" lIns="45720" rIns="45720">
+          <a:bodyPr wrap="square" lIns="45720" rIns="45720" anchor="t">
             <a:spAutoFit/>
           </a:bodyPr>
           <a:lstStyle/>
@@ -9320,7 +11156,7 @@
           <a:noFill/>
         </p:spPr>
         <p:txBody>
-          <a:bodyPr wrap="square" anchor="t" lIns="45720" rIns="45720">
+          <a:bodyPr wrap="square" lIns="45720" rIns="45720" anchor="t">
             <a:spAutoFit/>
           </a:bodyPr>
           <a:lstStyle/>
@@ -9375,7 +11211,7 @@
           </a:fontRef>
         </p:style>
         <p:txBody>
-          <a:bodyPr rtlCol="0" anchor="ctr" lIns="0" rIns="0"/>
+          <a:bodyPr lIns="0" rIns="0" rtlCol="0" anchor="ctr"/>
           <a:lstStyle/>
           <a:p>
             <a:pPr algn="ctr"/>
@@ -9408,7 +11244,7 @@
           <a:noFill/>
         </p:spPr>
         <p:txBody>
-          <a:bodyPr wrap="square" anchor="t" lIns="45720" rIns="45720">
+          <a:bodyPr wrap="square" lIns="45720" rIns="45720" anchor="t">
             <a:spAutoFit/>
           </a:bodyPr>
           <a:lstStyle/>
@@ -9443,7 +11279,7 @@
           <a:noFill/>
         </p:spPr>
         <p:txBody>
-          <a:bodyPr wrap="square" anchor="t" lIns="45720" rIns="45720">
+          <a:bodyPr wrap="square" lIns="45720" rIns="45720" anchor="t">
             <a:spAutoFit/>
           </a:bodyPr>
           <a:lstStyle/>
@@ -9498,7 +11334,7 @@
           </a:fontRef>
         </p:style>
         <p:txBody>
-          <a:bodyPr rtlCol="0" anchor="ctr" lIns="228600"/>
+          <a:bodyPr lIns="228600" rtlCol="0" anchor="ctr"/>
           <a:lstStyle/>
           <a:p>
             <a:pPr algn="ctr"/>
@@ -9519,1068 +11355,6 @@
                 <a:latin typeface="Calibri"/>
               </a:rPr>
               <a:t>Build environment setup hands-on (120 min)</a:t>
-            </a:r>
-          </a:p>
-        </p:txBody>
-      </p:sp>
-    </p:spTree>
-  </p:cSld>
-  <p:clrMapOvr>
-    <a:masterClrMapping/>
-  </p:clrMapOvr>
-</p:sld>
-</file>
-
-<file path=ppt/slides/slide7.xml><?xml version="1.0" encoding="utf-8"?>
-<p:sld xmlns:a="http://schemas.openxmlformats.org/drawingml/2006/main" xmlns:p="http://schemas.openxmlformats.org/presentationml/2006/main" xmlns:r="http://schemas.openxmlformats.org/officeDocument/2006/relationships">
-  <p:cSld>
-    <p:spTree>
-      <p:nvGrpSpPr>
-        <p:cNvPr id="1" name=""/>
-        <p:cNvGrpSpPr/>
-        <p:nvPr/>
-      </p:nvGrpSpPr>
-      <p:grpSpPr/>
-      <p:sp>
-        <p:nvSpPr>
-          <p:cNvPr id="2" name="Title 1"/>
-          <p:cNvSpPr>
-            <a:spLocks noGrp="1"/>
-          </p:cNvSpPr>
-          <p:nvPr>
-            <p:ph type="ctrTitle"/>
-          </p:nvPr>
-        </p:nvSpPr>
-        <p:spPr/>
-        <p:txBody>
-          <a:bodyPr/>
-          <a:lstStyle/>
-          <a:p>
-            <a:r>
-              <a:rPr sz="4400" b="1">
-                <a:solidFill>
-                  <a:srgbClr val="FFFFFF"/>
-                </a:solidFill>
-                <a:latin typeface="Calibri"/>
-              </a:rPr>
-              <a:t>BitBake Deep Dive</a:t>
-            </a:r>
-          </a:p>
-        </p:txBody>
-      </p:sp>
-      <p:sp>
-        <p:nvSpPr>
-          <p:cNvPr id="3" name="Subtitle 2"/>
-          <p:cNvSpPr>
-            <a:spLocks noGrp="1"/>
-          </p:cNvSpPr>
-          <p:nvPr>
-            <p:ph type="subTitle" idx="1"/>
-          </p:nvPr>
-        </p:nvSpPr>
-        <p:spPr/>
-        <p:txBody>
-          <a:bodyPr/>
-          <a:lstStyle/>
-          <a:p>
-            <a:r>
-              <a:rPr sz="2200" i="1">
-                <a:solidFill>
-                  <a:srgbClr val="FFFFFF"/>
-                </a:solidFill>
-                <a:latin typeface="Calibri"/>
-              </a:rPr>
-              <a:t>Day 1 • Session 6 • 75 minutes</a:t>
-            </a:r>
-          </a:p>
-          <a:p>
-            <a:r>
-              <a:rPr sz="1800">
-                <a:solidFill>
-                  <a:srgbClr val="FFFFFF"/>
-                </a:solidFill>
-                <a:latin typeface="Calibri"/>
-              </a:rPr>
-              <a:t>Tasks, execution, variables, overrides</a:t>
-            </a:r>
-          </a:p>
-        </p:txBody>
-      </p:sp>
-    </p:spTree>
-  </p:cSld>
-  <p:clrMapOvr>
-    <a:masterClrMapping/>
-  </p:clrMapOvr>
-</p:sld>
-</file>
-
-<file path=ppt/slides/slide8.xml><?xml version="1.0" encoding="utf-8"?>
-<p:sld xmlns:a="http://schemas.openxmlformats.org/drawingml/2006/main" xmlns:p="http://schemas.openxmlformats.org/presentationml/2006/main" xmlns:r="http://schemas.openxmlformats.org/officeDocument/2006/relationships">
-  <p:cSld>
-    <p:spTree>
-      <p:nvGrpSpPr>
-        <p:cNvPr id="1" name=""/>
-        <p:cNvGrpSpPr/>
-        <p:nvPr/>
-      </p:nvGrpSpPr>
-      <p:grpSpPr/>
-      <p:sp>
-        <p:nvSpPr>
-          <p:cNvPr id="2" name="Title 1"/>
-          <p:cNvSpPr>
-            <a:spLocks noGrp="1"/>
-          </p:cNvSpPr>
-          <p:nvPr>
-            <p:ph type="title"/>
-          </p:nvPr>
-        </p:nvSpPr>
-        <p:spPr/>
-        <p:txBody>
-          <a:bodyPr/>
-          <a:lstStyle/>
-          <a:p>
-            <a:r>
-              <a:rPr sz="3200" b="1">
-                <a:solidFill>
-                  <a:srgbClr val="CC0066"/>
-                </a:solidFill>
-                <a:latin typeface="Calibri"/>
-              </a:rPr>
-              <a:t>Session Agenda</a:t>
-            </a:r>
-          </a:p>
-        </p:txBody>
-      </p:sp>
-      <p:sp>
-        <p:nvSpPr>
-          <p:cNvPr id="3" name="TextBox 2"/>
-          <p:cNvSpPr txBox="1"/>
-          <p:nvPr/>
-        </p:nvSpPr>
-        <p:spPr>
-          <a:xfrm>
-            <a:off x="822960" y="1463040"/>
-            <a:ext cx="10515600" cy="5029200"/>
-          </a:xfrm>
-          <a:prstGeom prst="rect">
-            <a:avLst/>
-          </a:prstGeom>
-          <a:noFill/>
-        </p:spPr>
-        <p:txBody>
-          <a:bodyPr wrap="square" lIns="45720" rIns="45720">
-            <a:spAutoFit/>
-          </a:bodyPr>
-          <a:lstStyle/>
-          <a:p>
-            <a:pPr>
-              <a:spcAft>
-                <a:spcPts val="600"/>
-              </a:spcAft>
-            </a:pPr>
-            <a:r>
-              <a:rPr sz="2000" b="0" i="0">
-                <a:solidFill>
-                  <a:srgbClr val="333333"/>
-                </a:solidFill>
-                <a:latin typeface="Calibri"/>
-              </a:rPr>
-              <a:t>1.  BitBake's job — parse, plan, execute</a:t>
-            </a:r>
-          </a:p>
-          <a:p>
-            <a:pPr>
-              <a:spcAft>
-                <a:spcPts val="600"/>
-              </a:spcAft>
-            </a:pPr>
-            <a:r>
-              <a:rPr sz="2000" b="0" i="0">
-                <a:solidFill>
-                  <a:srgbClr val="333333"/>
-                </a:solidFill>
-                <a:latin typeface="Calibri"/>
-              </a:rPr>
-              <a:t>2.  The standard task chain</a:t>
-            </a:r>
-          </a:p>
-          <a:p>
-            <a:pPr>
-              <a:spcAft>
-                <a:spcPts val="600"/>
-              </a:spcAft>
-            </a:pPr>
-            <a:r>
-              <a:rPr sz="2000" b="0" i="0">
-                <a:solidFill>
-                  <a:srgbClr val="333333"/>
-                </a:solidFill>
-                <a:latin typeface="Calibri"/>
-              </a:rPr>
-              <a:t>3.  Variables — assignment operators</a:t>
-            </a:r>
-          </a:p>
-          <a:p>
-            <a:pPr>
-              <a:spcAft>
-                <a:spcPts val="600"/>
-              </a:spcAft>
-            </a:pPr>
-            <a:r>
-              <a:rPr sz="2000" b="0" i="0">
-                <a:solidFill>
-                  <a:srgbClr val="333333"/>
-                </a:solidFill>
-                <a:latin typeface="Calibri"/>
-              </a:rPr>
-              <a:t>4.  Overrides — how Yocto picks variants</a:t>
-            </a:r>
-          </a:p>
-          <a:p>
-            <a:pPr>
-              <a:spcAft>
-                <a:spcPts val="600"/>
-              </a:spcAft>
-            </a:pPr>
-            <a:r>
-              <a:rPr sz="2000" b="0" i="0">
-                <a:solidFill>
-                  <a:srgbClr val="333333"/>
-                </a:solidFill>
-                <a:latin typeface="Calibri"/>
-              </a:rPr>
-              <a:t>5.  Configuration files: local.conf, bblayers.conf, distro/machine config</a:t>
-            </a:r>
-          </a:p>
-          <a:p>
-            <a:pPr>
-              <a:spcAft>
-                <a:spcPts val="600"/>
-              </a:spcAft>
-            </a:pPr>
-            <a:r>
-              <a:rPr sz="2000" b="0" i="0">
-                <a:solidFill>
-                  <a:srgbClr val="333333"/>
-                </a:solidFill>
-                <a:latin typeface="Calibri"/>
-              </a:rPr>
-              <a:t>6.  Useful inspection commands</a:t>
-            </a:r>
-          </a:p>
-        </p:txBody>
-      </p:sp>
-    </p:spTree>
-  </p:cSld>
-  <p:clrMapOvr>
-    <a:masterClrMapping/>
-  </p:clrMapOvr>
-</p:sld>
-</file>
-
-<file path=ppt/slides/slide9.xml><?xml version="1.0" encoding="utf-8"?>
-<p:sld xmlns:a="http://schemas.openxmlformats.org/drawingml/2006/main" xmlns:p="http://schemas.openxmlformats.org/presentationml/2006/main" xmlns:r="http://schemas.openxmlformats.org/officeDocument/2006/relationships">
-  <p:cSld>
-    <p:spTree>
-      <p:nvGrpSpPr>
-        <p:cNvPr id="1" name=""/>
-        <p:cNvGrpSpPr/>
-        <p:nvPr/>
-      </p:nvGrpSpPr>
-      <p:grpSpPr/>
-      <p:sp>
-        <p:nvSpPr>
-          <p:cNvPr id="2" name="Title 1"/>
-          <p:cNvSpPr>
-            <a:spLocks noGrp="1"/>
-          </p:cNvSpPr>
-          <p:nvPr>
-            <p:ph type="title"/>
-          </p:nvPr>
-        </p:nvSpPr>
-        <p:spPr/>
-        <p:txBody>
-          <a:bodyPr/>
-          <a:lstStyle/>
-          <a:p>
-            <a:r>
-              <a:rPr sz="3200" b="1">
-                <a:solidFill>
-                  <a:srgbClr val="CC0066"/>
-                </a:solidFill>
-                <a:latin typeface="Calibri"/>
-              </a:rPr>
-              <a:t>BitBake's Job</a:t>
-            </a:r>
-          </a:p>
-        </p:txBody>
-      </p:sp>
-      <p:sp>
-        <p:nvSpPr>
-          <p:cNvPr id="3" name="TextBox 2"/>
-          <p:cNvSpPr txBox="1"/>
-          <p:nvPr/>
-        </p:nvSpPr>
-        <p:spPr>
-          <a:xfrm>
-            <a:off x="822960" y="1417320"/>
-            <a:ext cx="10515600" cy="365760"/>
-          </a:xfrm>
-          <a:prstGeom prst="rect">
-            <a:avLst/>
-          </a:prstGeom>
-          <a:noFill/>
-        </p:spPr>
-        <p:txBody>
-          <a:bodyPr wrap="square" anchor="t" lIns="45720" rIns="45720">
-            <a:spAutoFit/>
-          </a:bodyPr>
-          <a:lstStyle/>
-          <a:p>
-            <a:pPr algn="l"/>
-            <a:r>
-              <a:rPr sz="1500" b="0" i="1">
-                <a:solidFill>
-                  <a:srgbClr val="666666"/>
-                </a:solidFill>
-                <a:latin typeface="Calibri"/>
-              </a:rPr>
-              <a:t>Three phases for every build.</a:t>
-            </a:r>
-          </a:p>
-        </p:txBody>
-      </p:sp>
-      <p:sp>
-        <p:nvSpPr>
-          <p:cNvPr id="4" name="Rectangle 3"/>
-          <p:cNvSpPr/>
-          <p:nvPr/>
-        </p:nvSpPr>
-        <p:spPr>
-          <a:xfrm>
-            <a:off x="640080" y="1783080"/>
-            <a:ext cx="3520440" cy="640080"/>
-          </a:xfrm>
-          <a:prstGeom prst="rect">
-            <a:avLst/>
-          </a:prstGeom>
-          <a:solidFill>
-            <a:srgbClr val="CC0066"/>
-          </a:solidFill>
-          <a:ln>
-            <a:noFill/>
-          </a:ln>
-          <a:effectLst/>
-        </p:spPr>
-        <p:style>
-          <a:lnRef idx="1">
-            <a:schemeClr val="accent1"/>
-          </a:lnRef>
-          <a:fillRef idx="3">
-            <a:schemeClr val="accent1"/>
-          </a:fillRef>
-          <a:effectRef idx="2">
-            <a:schemeClr val="accent1"/>
-          </a:effectRef>
-          <a:fontRef idx="minor">
-            <a:schemeClr val="lt1"/>
-          </a:fontRef>
-        </p:style>
-        <p:txBody>
-          <a:bodyPr rtlCol="0" anchor="ctr" lIns="182880"/>
-          <a:lstStyle/>
-          <a:p>
-            <a:pPr algn="ctr"/>
-            <a:r>
-              <a:rPr sz="2000" b="1">
-                <a:solidFill>
-                  <a:srgbClr val="FFFFFF"/>
-                </a:solidFill>
-                <a:latin typeface="Calibri"/>
-              </a:rPr>
-              <a:t>Parse</a:t>
-            </a:r>
-          </a:p>
-          <a:p>
-            <a:r>
-              <a:rPr sz="1200" i="1">
-                <a:solidFill>
-                  <a:srgbClr val="FFFFFF"/>
-                </a:solidFill>
-                <a:latin typeface="Calibri"/>
-              </a:rPr>
-              <a:t>Read metadata</a:t>
-            </a:r>
-          </a:p>
-        </p:txBody>
-      </p:sp>
-      <p:sp>
-        <p:nvSpPr>
-          <p:cNvPr id="5" name="Rectangle 4"/>
-          <p:cNvSpPr/>
-          <p:nvPr/>
-        </p:nvSpPr>
-        <p:spPr>
-          <a:xfrm>
-            <a:off x="640080" y="2423160"/>
-            <a:ext cx="3520440" cy="3931920"/>
-          </a:xfrm>
-          <a:prstGeom prst="rect">
-            <a:avLst/>
-          </a:prstGeom>
-          <a:solidFill>
-            <a:srgbClr val="FAFAFA"/>
-          </a:solidFill>
-          <a:ln w="6350">
-            <a:solidFill>
-              <a:srgbClr val="CC0066"/>
-            </a:solidFill>
-          </a:ln>
-          <a:effectLst/>
-        </p:spPr>
-        <p:style>
-          <a:lnRef idx="1">
-            <a:schemeClr val="accent1"/>
-          </a:lnRef>
-          <a:fillRef idx="3">
-            <a:schemeClr val="accent1"/>
-          </a:fillRef>
-          <a:effectRef idx="2">
-            <a:schemeClr val="accent1"/>
-          </a:effectRef>
-          <a:fontRef idx="minor">
-            <a:schemeClr val="lt1"/>
-          </a:fontRef>
-        </p:style>
-        <p:txBody>
-          <a:bodyPr rtlCol="0" anchor="ctr"/>
-          <a:lstStyle/>
-          <a:p>
-            <a:pPr algn="ctr"/>
-          </a:p>
-        </p:txBody>
-      </p:sp>
-      <p:sp>
-        <p:nvSpPr>
-          <p:cNvPr id="6" name="TextBox 5"/>
-          <p:cNvSpPr txBox="1"/>
-          <p:nvPr/>
-        </p:nvSpPr>
-        <p:spPr>
-          <a:xfrm>
-            <a:off x="731519" y="2514600"/>
-            <a:ext cx="3337560" cy="3749039"/>
-          </a:xfrm>
-          <a:prstGeom prst="rect">
-            <a:avLst/>
-          </a:prstGeom>
-          <a:noFill/>
-        </p:spPr>
-        <p:txBody>
-          <a:bodyPr wrap="square" lIns="45720" rIns="45720">
-            <a:spAutoFit/>
-          </a:bodyPr>
-          <a:lstStyle/>
-          <a:p>
-            <a:pPr>
-              <a:spcAft>
-                <a:spcPts val="400"/>
-              </a:spcAft>
-            </a:pPr>
-            <a:r>
-              <a:rPr sz="1200" b="1" i="0">
-                <a:solidFill>
-                  <a:srgbClr val="CC0066"/>
-                </a:solidFill>
-                <a:latin typeface="Calibri"/>
-              </a:rPr>
-              <a:t>Reads:</a:t>
-            </a:r>
-          </a:p>
-          <a:p>
-            <a:pPr>
-              <a:spcAft>
-                <a:spcPts val="400"/>
-              </a:spcAft>
-            </a:pPr>
-            <a:r>
-              <a:rPr sz="1100" b="0" i="0">
-                <a:solidFill>
-                  <a:srgbClr val="333333"/>
-                </a:solidFill>
-                <a:latin typeface="Calibri"/>
-              </a:rPr>
-              <a:t>.bb (recipes)</a:t>
-            </a:r>
-          </a:p>
-          <a:p>
-            <a:pPr>
-              <a:spcAft>
-                <a:spcPts val="400"/>
-              </a:spcAft>
-            </a:pPr>
-            <a:r>
-              <a:rPr sz="1100" b="0" i="0">
-                <a:solidFill>
-                  <a:srgbClr val="333333"/>
-                </a:solidFill>
-                <a:latin typeface="Calibri"/>
-              </a:rPr>
-              <a:t>.bbclass (classes)</a:t>
-            </a:r>
-          </a:p>
-          <a:p>
-            <a:pPr>
-              <a:spcAft>
-                <a:spcPts val="400"/>
-              </a:spcAft>
-            </a:pPr>
-            <a:r>
-              <a:rPr sz="1100" b="0" i="0">
-                <a:solidFill>
-                  <a:srgbClr val="333333"/>
-                </a:solidFill>
-                <a:latin typeface="Calibri"/>
-              </a:rPr>
-              <a:t>.conf (configuration)</a:t>
-            </a:r>
-          </a:p>
-          <a:p>
-            <a:pPr>
-              <a:spcAft>
-                <a:spcPts val="400"/>
-              </a:spcAft>
-            </a:pPr>
-            <a:r>
-              <a:rPr sz="1100" b="0" i="0">
-                <a:solidFill>
-                  <a:srgbClr val="333333"/>
-                </a:solidFill>
-                <a:latin typeface="Calibri"/>
-              </a:rPr>
-              <a:t>.inc (includes)</a:t>
-            </a:r>
-          </a:p>
-          <a:p>
-            <a:pPr>
-              <a:spcAft>
-                <a:spcPts val="400"/>
-              </a:spcAft>
-            </a:pPr>
-            <a:r>
-              <a:rPr sz="1100" b="0" i="0">
-                <a:solidFill>
-                  <a:srgbClr val="333333"/>
-                </a:solidFill>
-                <a:latin typeface="Calibri"/>
-              </a:rPr>
-              <a:t/>
-            </a:r>
-          </a:p>
-          <a:p>
-            <a:pPr>
-              <a:spcAft>
-                <a:spcPts val="400"/>
-              </a:spcAft>
-            </a:pPr>
-            <a:r>
-              <a:rPr sz="1200" b="1" i="0">
-                <a:solidFill>
-                  <a:srgbClr val="CC0066"/>
-                </a:solidFill>
-                <a:latin typeface="Calibri"/>
-              </a:rPr>
-              <a:t>Output:</a:t>
-            </a:r>
-          </a:p>
-          <a:p>
-            <a:pPr>
-              <a:spcAft>
-                <a:spcPts val="400"/>
-              </a:spcAft>
-            </a:pPr>
-            <a:r>
-              <a:rPr sz="1100" b="0" i="0">
-                <a:solidFill>
-                  <a:srgbClr val="333333"/>
-                </a:solidFill>
-                <a:latin typeface="Calibri"/>
-              </a:rPr>
-              <a:t>A dependency database of all recipes, variables, tasks</a:t>
-            </a:r>
-          </a:p>
-        </p:txBody>
-      </p:sp>
-      <p:sp>
-        <p:nvSpPr>
-          <p:cNvPr id="7" name="Rectangle 6"/>
-          <p:cNvSpPr/>
-          <p:nvPr/>
-        </p:nvSpPr>
-        <p:spPr>
-          <a:xfrm>
-            <a:off x="4297680" y="1783080"/>
-            <a:ext cx="3520440" cy="640080"/>
-          </a:xfrm>
-          <a:prstGeom prst="rect">
-            <a:avLst/>
-          </a:prstGeom>
-          <a:solidFill>
-            <a:srgbClr val="663399"/>
-          </a:solidFill>
-          <a:ln>
-            <a:noFill/>
-          </a:ln>
-          <a:effectLst/>
-        </p:spPr>
-        <p:style>
-          <a:lnRef idx="1">
-            <a:schemeClr val="accent1"/>
-          </a:lnRef>
-          <a:fillRef idx="3">
-            <a:schemeClr val="accent1"/>
-          </a:fillRef>
-          <a:effectRef idx="2">
-            <a:schemeClr val="accent1"/>
-          </a:effectRef>
-          <a:fontRef idx="minor">
-            <a:schemeClr val="lt1"/>
-          </a:fontRef>
-        </p:style>
-        <p:txBody>
-          <a:bodyPr rtlCol="0" anchor="ctr" lIns="182880"/>
-          <a:lstStyle/>
-          <a:p>
-            <a:pPr algn="ctr"/>
-            <a:r>
-              <a:rPr sz="2000" b="1">
-                <a:solidFill>
-                  <a:srgbClr val="FFFFFF"/>
-                </a:solidFill>
-                <a:latin typeface="Calibri"/>
-              </a:rPr>
-              <a:t>Plan</a:t>
-            </a:r>
-          </a:p>
-          <a:p>
-            <a:r>
-              <a:rPr sz="1200" i="1">
-                <a:solidFill>
-                  <a:srgbClr val="FFFFFF"/>
-                </a:solidFill>
-                <a:latin typeface="Calibri"/>
-              </a:rPr>
-              <a:t>Build task graph</a:t>
-            </a:r>
-          </a:p>
-        </p:txBody>
-      </p:sp>
-      <p:sp>
-        <p:nvSpPr>
-          <p:cNvPr id="8" name="Rectangle 7"/>
-          <p:cNvSpPr/>
-          <p:nvPr/>
-        </p:nvSpPr>
-        <p:spPr>
-          <a:xfrm>
-            <a:off x="4297680" y="2423160"/>
-            <a:ext cx="3520440" cy="3931920"/>
-          </a:xfrm>
-          <a:prstGeom prst="rect">
-            <a:avLst/>
-          </a:prstGeom>
-          <a:solidFill>
-            <a:srgbClr val="FAFAFA"/>
-          </a:solidFill>
-          <a:ln w="6350">
-            <a:solidFill>
-              <a:srgbClr val="663399"/>
-            </a:solidFill>
-          </a:ln>
-          <a:effectLst/>
-        </p:spPr>
-        <p:style>
-          <a:lnRef idx="1">
-            <a:schemeClr val="accent1"/>
-          </a:lnRef>
-          <a:fillRef idx="3">
-            <a:schemeClr val="accent1"/>
-          </a:fillRef>
-          <a:effectRef idx="2">
-            <a:schemeClr val="accent1"/>
-          </a:effectRef>
-          <a:fontRef idx="minor">
-            <a:schemeClr val="lt1"/>
-          </a:fontRef>
-        </p:style>
-        <p:txBody>
-          <a:bodyPr rtlCol="0" anchor="ctr"/>
-          <a:lstStyle/>
-          <a:p>
-            <a:pPr algn="ctr"/>
-          </a:p>
-        </p:txBody>
-      </p:sp>
-      <p:sp>
-        <p:nvSpPr>
-          <p:cNvPr id="9" name="TextBox 8"/>
-          <p:cNvSpPr txBox="1"/>
-          <p:nvPr/>
-        </p:nvSpPr>
-        <p:spPr>
-          <a:xfrm>
-            <a:off x="4389120" y="2514600"/>
-            <a:ext cx="3337560" cy="3749039"/>
-          </a:xfrm>
-          <a:prstGeom prst="rect">
-            <a:avLst/>
-          </a:prstGeom>
-          <a:noFill/>
-        </p:spPr>
-        <p:txBody>
-          <a:bodyPr wrap="square" lIns="45720" rIns="45720">
-            <a:spAutoFit/>
-          </a:bodyPr>
-          <a:lstStyle/>
-          <a:p>
-            <a:pPr>
-              <a:spcAft>
-                <a:spcPts val="400"/>
-              </a:spcAft>
-            </a:pPr>
-            <a:r>
-              <a:rPr sz="1200" b="1" i="0">
-                <a:solidFill>
-                  <a:srgbClr val="663399"/>
-                </a:solidFill>
-                <a:latin typeface="Calibri"/>
-              </a:rPr>
-              <a:t>Resolves:</a:t>
-            </a:r>
-          </a:p>
-          <a:p>
-            <a:pPr>
-              <a:spcAft>
-                <a:spcPts val="400"/>
-              </a:spcAft>
-            </a:pPr>
-            <a:r>
-              <a:rPr sz="1100" b="0" i="0">
-                <a:solidFill>
-                  <a:srgbClr val="333333"/>
-                </a:solidFill>
-                <a:latin typeface="Calibri"/>
-              </a:rPr>
-              <a:t>Build-time dependencies</a:t>
-            </a:r>
-          </a:p>
-          <a:p>
-            <a:pPr>
-              <a:spcAft>
-                <a:spcPts val="400"/>
-              </a:spcAft>
-            </a:pPr>
-            <a:r>
-              <a:rPr sz="1100" b="0" i="0">
-                <a:solidFill>
-                  <a:srgbClr val="333333"/>
-                </a:solidFill>
-                <a:latin typeface="Calibri"/>
-              </a:rPr>
-              <a:t>Runtime dependencies</a:t>
-            </a:r>
-          </a:p>
-          <a:p>
-            <a:pPr>
-              <a:spcAft>
-                <a:spcPts val="400"/>
-              </a:spcAft>
-            </a:pPr>
-            <a:r>
-              <a:rPr sz="1100" b="0" i="0">
-                <a:solidFill>
-                  <a:srgbClr val="333333"/>
-                </a:solidFill>
-                <a:latin typeface="Calibri"/>
-              </a:rPr>
-              <a:t>Variants and overrides</a:t>
-            </a:r>
-          </a:p>
-          <a:p>
-            <a:pPr>
-              <a:spcAft>
-                <a:spcPts val="400"/>
-              </a:spcAft>
-            </a:pPr>
-            <a:r>
-              <a:rPr sz="1100" b="0" i="0">
-                <a:solidFill>
-                  <a:srgbClr val="333333"/>
-                </a:solidFill>
-                <a:latin typeface="Calibri"/>
-              </a:rPr>
-              <a:t/>
-            </a:r>
-          </a:p>
-          <a:p>
-            <a:pPr>
-              <a:spcAft>
-                <a:spcPts val="400"/>
-              </a:spcAft>
-            </a:pPr>
-            <a:r>
-              <a:rPr sz="1200" b="1" i="0">
-                <a:solidFill>
-                  <a:srgbClr val="663399"/>
-                </a:solidFill>
-                <a:latin typeface="Calibri"/>
-              </a:rPr>
-              <a:t>Output:</a:t>
-            </a:r>
-          </a:p>
-          <a:p>
-            <a:pPr>
-              <a:spcAft>
-                <a:spcPts val="400"/>
-              </a:spcAft>
-            </a:pPr>
-            <a:r>
-              <a:rPr sz="1100" b="0" i="0">
-                <a:solidFill>
-                  <a:srgbClr val="333333"/>
-                </a:solidFill>
-                <a:latin typeface="Calibri"/>
-              </a:rPr>
-              <a:t>An ordered task graph; sstate is consulted to skip already-built tasks</a:t>
-            </a:r>
-          </a:p>
-        </p:txBody>
-      </p:sp>
-      <p:sp>
-        <p:nvSpPr>
-          <p:cNvPr id="10" name="Rectangle 9"/>
-          <p:cNvSpPr/>
-          <p:nvPr/>
-        </p:nvSpPr>
-        <p:spPr>
-          <a:xfrm>
-            <a:off x="7955279" y="1783080"/>
-            <a:ext cx="3520440" cy="640080"/>
-          </a:xfrm>
-          <a:prstGeom prst="rect">
-            <a:avLst/>
-          </a:prstGeom>
-          <a:solidFill>
-            <a:srgbClr val="CC0066"/>
-          </a:solidFill>
-          <a:ln>
-            <a:noFill/>
-          </a:ln>
-          <a:effectLst/>
-        </p:spPr>
-        <p:style>
-          <a:lnRef idx="1">
-            <a:schemeClr val="accent1"/>
-          </a:lnRef>
-          <a:fillRef idx="3">
-            <a:schemeClr val="accent1"/>
-          </a:fillRef>
-          <a:effectRef idx="2">
-            <a:schemeClr val="accent1"/>
-          </a:effectRef>
-          <a:fontRef idx="minor">
-            <a:schemeClr val="lt1"/>
-          </a:fontRef>
-        </p:style>
-        <p:txBody>
-          <a:bodyPr rtlCol="0" anchor="ctr" lIns="182880"/>
-          <a:lstStyle/>
-          <a:p>
-            <a:pPr algn="ctr"/>
-            <a:r>
-              <a:rPr sz="2000" b="1">
-                <a:solidFill>
-                  <a:srgbClr val="FFFFFF"/>
-                </a:solidFill>
-                <a:latin typeface="Calibri"/>
-              </a:rPr>
-              <a:t>Execute</a:t>
-            </a:r>
-          </a:p>
-          <a:p>
-            <a:r>
-              <a:rPr sz="1200" i="1">
-                <a:solidFill>
-                  <a:srgbClr val="FFFFFF"/>
-                </a:solidFill>
-                <a:latin typeface="Calibri"/>
-              </a:rPr>
-              <a:t>Run tasks</a:t>
-            </a:r>
-          </a:p>
-        </p:txBody>
-      </p:sp>
-      <p:sp>
-        <p:nvSpPr>
-          <p:cNvPr id="11" name="Rectangle 10"/>
-          <p:cNvSpPr/>
-          <p:nvPr/>
-        </p:nvSpPr>
-        <p:spPr>
-          <a:xfrm>
-            <a:off x="7955279" y="2423160"/>
-            <a:ext cx="3520440" cy="3931920"/>
-          </a:xfrm>
-          <a:prstGeom prst="rect">
-            <a:avLst/>
-          </a:prstGeom>
-          <a:solidFill>
-            <a:srgbClr val="FAFAFA"/>
-          </a:solidFill>
-          <a:ln w="6350">
-            <a:solidFill>
-              <a:srgbClr val="CC0066"/>
-            </a:solidFill>
-          </a:ln>
-          <a:effectLst/>
-        </p:spPr>
-        <p:style>
-          <a:lnRef idx="1">
-            <a:schemeClr val="accent1"/>
-          </a:lnRef>
-          <a:fillRef idx="3">
-            <a:schemeClr val="accent1"/>
-          </a:fillRef>
-          <a:effectRef idx="2">
-            <a:schemeClr val="accent1"/>
-          </a:effectRef>
-          <a:fontRef idx="minor">
-            <a:schemeClr val="lt1"/>
-          </a:fontRef>
-        </p:style>
-        <p:txBody>
-          <a:bodyPr rtlCol="0" anchor="ctr"/>
-          <a:lstStyle/>
-          <a:p>
-            <a:pPr algn="ctr"/>
-          </a:p>
-        </p:txBody>
-      </p:sp>
-      <p:sp>
-        <p:nvSpPr>
-          <p:cNvPr id="12" name="TextBox 11"/>
-          <p:cNvSpPr txBox="1"/>
-          <p:nvPr/>
-        </p:nvSpPr>
-        <p:spPr>
-          <a:xfrm>
-            <a:off x="8046719" y="2514600"/>
-            <a:ext cx="3337560" cy="3749039"/>
-          </a:xfrm>
-          <a:prstGeom prst="rect">
-            <a:avLst/>
-          </a:prstGeom>
-          <a:noFill/>
-        </p:spPr>
-        <p:txBody>
-          <a:bodyPr wrap="square" lIns="45720" rIns="45720">
-            <a:spAutoFit/>
-          </a:bodyPr>
-          <a:lstStyle/>
-          <a:p>
-            <a:pPr>
-              <a:spcAft>
-                <a:spcPts val="400"/>
-              </a:spcAft>
-            </a:pPr>
-            <a:r>
-              <a:rPr sz="1200" b="1" i="0">
-                <a:solidFill>
-                  <a:srgbClr val="CC0066"/>
-                </a:solidFill>
-                <a:latin typeface="Calibri"/>
-              </a:rPr>
-              <a:t>Runs:</a:t>
-            </a:r>
-          </a:p>
-          <a:p>
-            <a:pPr>
-              <a:spcAft>
-                <a:spcPts val="400"/>
-              </a:spcAft>
-            </a:pPr>
-            <a:r>
-              <a:rPr sz="1100" b="0" i="0">
-                <a:solidFill>
-                  <a:srgbClr val="333333"/>
-                </a:solidFill>
-                <a:latin typeface="Calibri"/>
-              </a:rPr>
-              <a:t>Tasks in parallel where possible</a:t>
-            </a:r>
-          </a:p>
-          <a:p>
-            <a:pPr>
-              <a:spcAft>
-                <a:spcPts val="400"/>
-              </a:spcAft>
-            </a:pPr>
-            <a:r>
-              <a:rPr sz="1100" b="0" i="0">
-                <a:solidFill>
-                  <a:srgbClr val="333333"/>
-                </a:solidFill>
-                <a:latin typeface="Calibri"/>
-              </a:rPr>
-              <a:t>Honoring BB_NUMBER_THREADS</a:t>
-            </a:r>
-          </a:p>
-          <a:p>
-            <a:pPr>
-              <a:spcAft>
-                <a:spcPts val="400"/>
-              </a:spcAft>
-            </a:pPr>
-            <a:r>
-              <a:rPr sz="1100" b="0" i="0">
-                <a:solidFill>
-                  <a:srgbClr val="333333"/>
-                </a:solidFill>
-                <a:latin typeface="Calibri"/>
-              </a:rPr>
-              <a:t/>
-            </a:r>
-          </a:p>
-          <a:p>
-            <a:pPr>
-              <a:spcAft>
-                <a:spcPts val="400"/>
-              </a:spcAft>
-            </a:pPr>
-            <a:r>
-              <a:rPr sz="1200" b="1" i="0">
-                <a:solidFill>
-                  <a:srgbClr val="CC0066"/>
-                </a:solidFill>
-                <a:latin typeface="Calibri"/>
-              </a:rPr>
-              <a:t>Per task:</a:t>
-            </a:r>
-          </a:p>
-          <a:p>
-            <a:pPr>
-              <a:spcAft>
-                <a:spcPts val="400"/>
-              </a:spcAft>
-            </a:pPr>
-            <a:r>
-              <a:rPr sz="1100" b="0" i="0">
-                <a:solidFill>
-                  <a:srgbClr val="333333"/>
-                </a:solidFill>
-                <a:latin typeface="Calibri"/>
-              </a:rPr>
-              <a:t>Run task function, hash inputs, write outputs, cache in sstate</a:t>
             </a:r>
           </a:p>
         </p:txBody>
